--- a/talks/20260809/slides.pptx
+++ b/talks/20260809/slides.pptx
@@ -7050,31 +7050,31 @@
           <a:p>
             <a:pPr/>
             <a:r>
-              <a:t>Qwen3-0.6B-Base, full fine-tuning, with a linear classification head over tool names.</a:t>
+              <a:t>Qwen3-0.6B-Base, full fine-tuning, with a linear classification head over tool names</a:t>
             </a:r>
           </a:p>
           <a:p>
             <a:pPr lvl="1"/>
             <a:r>
-              <a:t>One forward pass per event, with supervision at every sentence-boundary position.</a:t>
+              <a:t>One forward pass per event, with supervision at every sentence-boundary position</a:t>
             </a:r>
           </a:p>
           <a:p>
             <a:pPr lvl="1"/>
             <a:r>
-              <a:t>Each position is weighted 1/mᵢ, so the training distribution matches deployment, where the probe is queried at every sentence boundary.</a:t>
+              <a:t>Each position is weighted 1/mᵢ, so the training distribution matches deployment, where the probe is queried at every sentence boundary</a:t>
             </a:r>
           </a:p>
           <a:p>
             <a:pPr lvl="2"/>
             <a:r>
-              <a:t>Learning rate 1e-5 · 3 epochs · max length 4,096 with left truncation (the end of the reasoning is kept) · fp32 weights with bf16 computation · fixed random seed.</a:t>
+              <a:t>Learning rate 1e-5 · 3 epochs · max length 4,096 with left truncation (the end of the reasoning is kept) · fp32 weights with bf16 computation · fixed random seed</a:t>
             </a:r>
           </a:p>
           <a:p>
             <a:pPr lvl="1"/>
             <a:r>
-              <a:t>Baseline probe: ModernBERT-base (150M), same procedure.</a:t>
+              <a:t>Baseline probe: ModernBERT-base (150M), same procedure</a:t>
             </a:r>
           </a:p>
         </p:txBody>
@@ -7172,11 +7172,26 @@
           <a:p>
             <a:pPr/>
             <a:r>
+              <a:t>We choose θ on a validation split so that precision reaches </a:t>
+            </a:r>
+            <a:r>
               <a:rPr b="1"/>
-              <a:t>We choose θ on a validation split so that precision reaches ~0.95, then freeze it.</a:t>
-            </a:r>
-            <a:r>
-              <a:t> Coverage is what remains: the fraction of events where the probe is still confident enough to predict.</a:t>
+              <a:t>~0.95</a:t>
+            </a:r>
+            <a:r>
+              <a:t>, then freeze it</a:t>
+            </a:r>
+          </a:p>
+          <a:p>
+            <a:pPr lvl="1"/>
+            <a:r>
+              <a:t>Coverage is what remains</a:t>
+            </a:r>
+          </a:p>
+          <a:p>
+            <a:pPr lvl="2"/>
+            <a:r>
+              <a:t>the fraction of events where the probe is still confident enough to predict</a:t>
             </a:r>
           </a:p>
         </p:txBody>
@@ -7197,14 +7212,47 @@
         </p:blipFill>
         <p:spPr>
           <a:xfrm>
-            <a:off x="2529840" y="3017520"/>
-            <a:ext cx="7132320" cy="2615184"/>
+            <a:off x="1066800" y="2926080"/>
+            <a:ext cx="10058400" cy="2640330"/>
           </a:xfrm>
           <a:prstGeom prst="rect">
             <a:avLst/>
           </a:prstGeom>
         </p:spPr>
       </p:pic>
+      <p:sp>
+        <p:nvSpPr>
+          <p:cNvPr id="5" name="TextBox 4"/>
+          <p:cNvSpPr txBox="1"/>
+          <p:nvPr/>
+        </p:nvSpPr>
+        <p:spPr>
+          <a:xfrm>
+            <a:off x="429584" y="6250000"/>
+            <a:ext cx="11365562" cy="500000"/>
+          </a:xfrm>
+          <a:prstGeom prst="rect">
+            <a:avLst/>
+          </a:prstGeom>
+          <a:noFill/>
+        </p:spPr>
+        <p:txBody>
+          <a:bodyPr wrap="square">
+            <a:spAutoFit/>
+          </a:bodyPr>
+          <a:lstStyle/>
+          <a:p>
+            <a:r>
+              <a:rPr sz="1200" i="1">
+                <a:solidFill>
+                  <a:srgbClr val="898781"/>
+                </a:solidFill>
+              </a:rPr>
+              <a:t>The AppWorld × qwen3.6 row uses the 0.90 precision target (no θ reached 0.95); all other rows use the 0.95 target. Precision is computed only on events where the probe made a prediction.</a:t>
+            </a:r>
+          </a:p>
+        </p:txBody>
+      </p:sp>
       <p:sp>
         <p:nvSpPr>
           <p:cNvPr id="4" name="灯片编号占位符 3">
@@ -7298,7 +7346,19 @@
           <a:p>
             <a:pPr/>
             <a:r>
-              <a:t>Higher θ: fewer predictions, higher accuracy. θ is chosen according to the acceptable error rate.</a:t>
+              <a:t>Higher θ</a:t>
+            </a:r>
+          </a:p>
+          <a:p>
+            <a:pPr lvl="1"/>
+            <a:r>
+              <a:t>fewer predictions, higher accuracy</a:t>
+            </a:r>
+          </a:p>
+          <a:p>
+            <a:pPr/>
+            <a:r>
+              <a:t>θ is chosen according to the acceptable error rate</a:t>
             </a:r>
           </a:p>
         </p:txBody>
@@ -7319,14 +7379,47 @@
         </p:blipFill>
         <p:spPr>
           <a:xfrm>
-            <a:off x="2895600" y="2286000"/>
-            <a:ext cx="6400800" cy="3498111"/>
+            <a:off x="2712720" y="2606040"/>
+            <a:ext cx="6766560" cy="3509169"/>
           </a:xfrm>
           <a:prstGeom prst="rect">
             <a:avLst/>
           </a:prstGeom>
         </p:spPr>
       </p:pic>
+      <p:sp>
+        <p:nvSpPr>
+          <p:cNvPr id="5" name="TextBox 4"/>
+          <p:cNvSpPr txBox="1"/>
+          <p:nvPr/>
+        </p:nvSpPr>
+        <p:spPr>
+          <a:xfrm>
+            <a:off x="429584" y="6250000"/>
+            <a:ext cx="11365562" cy="500000"/>
+          </a:xfrm>
+          <a:prstGeom prst="rect">
+            <a:avLst/>
+          </a:prstGeom>
+          <a:noFill/>
+        </p:spPr>
+        <p:txBody>
+          <a:bodyPr wrap="square">
+            <a:spAutoFit/>
+          </a:bodyPr>
+          <a:lstStyle/>
+          <a:p>
+            <a:r>
+              <a:rPr sz="1200" i="1">
+                <a:solidFill>
+                  <a:srgbClr val="898781"/>
+                </a:solidFill>
+              </a:rPr>
+              <a:t>AppWorld × gpt-oss. Numbers come from a different evaluation run than page 11 (here θ = 0.95 gives 0.925; there θ = 0.975 gives 0.951).</a:t>
+            </a:r>
+          </a:p>
+        </p:txBody>
+      </p:sp>
       <p:sp>
         <p:nvSpPr>
           <p:cNvPr id="4" name="灯片编号占位符 3">
@@ -7427,20 +7520,38 @@
               <a:t>0.58–0.84</a:t>
             </a:r>
             <a:r>
-              <a:t> (higher = earlier): predictions happen well before the reasoning is finished.</a:t>
+              <a:t> (higher = earlier)</a:t>
+            </a:r>
+          </a:p>
+          <a:p>
+            <a:pPr lvl="1"/>
+            <a:r>
+              <a:t>predictions happen well before the reasoning is finished</a:t>
             </a:r>
           </a:p>
           <a:p>
             <a:pPr/>
             <a:r>
-              <a:t>Ablation: removing the reasoning text from the input drops the calibration-split weighted accuracy from </a:t>
+              <a:t>Ablation</a:t>
+            </a:r>
+          </a:p>
+          <a:p>
+            <a:pPr lvl="1"/>
+            <a:r>
+              <a:t>removing the reasoning text from the input drops the calibration-split weighted accuracy from </a:t>
             </a:r>
             <a:r>
               <a:rPr b="1"/>
               <a:t>0.613 to 0.421</a:t>
             </a:r>
             <a:r>
-              <a:t> (AppWorld). The prediction depends on the reasoning text, not on the task description alone.</a:t>
+              <a:t> (AppWorld)</a:t>
+            </a:r>
+          </a:p>
+          <a:p>
+            <a:pPr lvl="1"/>
+            <a:r>
+              <a:t>the prediction depends on the reasoning text, not on the task description alone</a:t>
             </a:r>
           </a:p>
         </p:txBody>
@@ -7461,14 +7572,47 @@
         </p:blipFill>
         <p:spPr>
           <a:xfrm>
-            <a:off x="4724400" y="3931920"/>
-            <a:ext cx="2743200" cy="2302328"/>
+            <a:off x="4221480" y="3794760"/>
+            <a:ext cx="3749039" cy="2436875"/>
           </a:xfrm>
           <a:prstGeom prst="rect">
             <a:avLst/>
           </a:prstGeom>
         </p:spPr>
       </p:pic>
+      <p:sp>
+        <p:nvSpPr>
+          <p:cNvPr id="5" name="TextBox 4"/>
+          <p:cNvSpPr txBox="1"/>
+          <p:nvPr/>
+        </p:nvSpPr>
+        <p:spPr>
+          <a:xfrm>
+            <a:off x="429584" y="6250000"/>
+            <a:ext cx="11365562" cy="500000"/>
+          </a:xfrm>
+          <a:prstGeom prst="rect">
+            <a:avLst/>
+          </a:prstGeom>
+          <a:noFill/>
+        </p:spPr>
+        <p:txBody>
+          <a:bodyPr wrap="square">
+            <a:spAutoFit/>
+          </a:bodyPr>
+          <a:lstStyle/>
+          <a:p>
+            <a:r>
+              <a:rPr sz="1200" i="1">
+                <a:solidFill>
+                  <a:srgbClr val="898781"/>
+                </a:solidFill>
+              </a:rPr>
+              <a:t>The ablation was run on an earlier dataset version with the ModernBERT probe: the direction of the effect is the result; absolute numbers are not comparable to page 11.</a:t>
+            </a:r>
+          </a:p>
+        </p:txBody>
+      </p:sp>
       <p:sp>
         <p:nvSpPr>
           <p:cNvPr id="4" name="灯片编号占位符 3">
@@ -7684,31 +7828,61 @@
           <a:p>
             <a:pPr/>
             <a:r>
-              <a:rPr b="1"/>
               <a:t>Injection</a:t>
             </a:r>
-            <a:r>
-              <a:t>: execute the predicted call early and feed it back to the agent — where to insert it (into the ongoing chain of thought, or elsewhere in the context), and whether to hand the model the tool result before it asks for it.</a:t>
+          </a:p>
+          <a:p>
+            <a:pPr lvl="1"/>
+            <a:r>
+              <a:t>execute the predicted call early and feed it back to the agent</a:t>
+            </a:r>
+          </a:p>
+          <a:p>
+            <a:pPr lvl="2"/>
+            <a:r>
+              <a:t>where to insert it: into the ongoing chain of thought, or elsewhere in the context</a:t>
+            </a:r>
+          </a:p>
+          <a:p>
+            <a:pPr lvl="2"/>
+            <a:r>
+              <a:t>whether to hand the model the tool result before it asks for it</a:t>
             </a:r>
           </a:p>
           <a:p>
             <a:pPr/>
             <a:r>
-              <a:rPr b="1"/>
               <a:t>Predicting the arguments</a:t>
             </a:r>
-            <a:r>
-              <a:t>: beyond the tool name — extract argument values from the text, or fix the tool name and let the agent model write the arguments.</a:t>
+          </a:p>
+          <a:p>
+            <a:pPr lvl="1"/>
+            <a:r>
+              <a:t>beyond the tool name</a:t>
+            </a:r>
+          </a:p>
+          <a:p>
+            <a:pPr lvl="2"/>
+            <a:r>
+              <a:t>extract argument values from the text, or fix the tool name and let the agent model write the arguments</a:t>
             </a:r>
           </a:p>
           <a:p>
             <a:pPr/>
             <a:r>
-              <a:rPr b="1"/>
               <a:t>Tool types</a:t>
             </a:r>
-            <a:r>
-              <a:t>: handle read-only and state-changing tools differently — early execution is safe for read-only tools, not for state-changing ones.</a:t>
+          </a:p>
+          <a:p>
+            <a:pPr lvl="1"/>
+            <a:r>
+              <a:t>handle read-only and state-changing tools differently</a:t>
+            </a:r>
+          </a:p>
+          <a:p>
+            <a:pPr lvl="2"/>
+            <a:r>
+              <a:t>early execution is safe for read-only tools, not for state-changing ones</a:t>
             </a:r>
           </a:p>
         </p:txBody>
@@ -7806,20 +7980,19 @@
           <a:p>
             <a:pPr/>
             <a:r>
-              <a:t>An agent solves a task in steps: </a:t>
-            </a:r>
-            <a:r>
-              <a:rPr b="1"/>
+              <a:t>An agent solves a task in steps</a:t>
+            </a:r>
+          </a:p>
+          <a:p>
+            <a:pPr lvl="1"/>
+            <a:r>
               <a:t>reason → call a tool → observe the result → continue reasoning</a:t>
             </a:r>
-            <a:r>
-              <a:t>.</a:t>
-            </a:r>
           </a:p>
           <a:p>
             <a:pPr/>
             <a:r>
-              <a:t>Each step ends in one tool call; everything before it is reasoning text.</a:t>
+              <a:t>Each step ends in one tool call; everything before it is reasoning text</a:t>
             </a:r>
           </a:p>
         </p:txBody>
@@ -7840,8 +8013,8 @@
         </p:blipFill>
         <p:spPr>
           <a:xfrm>
-            <a:off x="2529840" y="3017520"/>
-            <a:ext cx="7132320" cy="3101008"/>
+            <a:off x="1066800" y="2880360"/>
+            <a:ext cx="10058400" cy="3192448"/>
           </a:xfrm>
           <a:prstGeom prst="rect">
             <a:avLst/>
@@ -7948,7 +8121,17 @@
               <a:t>ReAct</a:t>
             </a:r>
             <a:r>
-              <a:t> pattern: reasoning text makes the plan, actions get information from the environment. (Yao et al., 2022, arXiv:2210.03629)</a:t>
+              <a:t> pattern </a:t>
+            </a:r>
+            <a:r>
+              <a:rPr b="0" sz="2000"/>
+              <a:t>[Yao et al., 2022]</a:t>
+            </a:r>
+          </a:p>
+          <a:p>
+            <a:pPr lvl="1"/>
+            <a:r>
+              <a:t>reasoning text makes the plan, actions get information from the environment</a:t>
             </a:r>
           </a:p>
           <a:p>
@@ -7968,7 +8151,7 @@
               <a:t>292</a:t>
             </a:r>
             <a:r>
-              <a:t> (qwen3.6-27b).</a:t>
+              <a:t> (qwen3.6-27b)</a:t>
             </a:r>
           </a:p>
           <a:p>
@@ -7980,9 +8163,6 @@
               <a:rPr b="1"/>
               <a:t>3.3M–5.7M tokens</a:t>
             </a:r>
-            <a:r>
-              <a:t>.</a:t>
-            </a:r>
           </a:p>
           <a:p>
             <a:pPr lvl="1"/>
@@ -7994,7 +8174,7 @@
               <a:t>8,192-token</a:t>
             </a:r>
             <a:r>
-              <a:t> generation limit.</a:t>
+              <a:t> generation limit</a:t>
             </a:r>
           </a:p>
         </p:txBody>
@@ -8015,8 +8195,8 @@
         </p:blipFill>
         <p:spPr>
           <a:xfrm>
-            <a:off x="2987040" y="3977639"/>
-            <a:ext cx="6217920" cy="1881738"/>
+            <a:off x="1798320" y="3977639"/>
+            <a:ext cx="8595360" cy="1583355"/>
           </a:xfrm>
           <a:prstGeom prst="rect">
             <a:avLst/>
@@ -8116,26 +8296,42 @@
           <a:p>
             <a:pPr/>
             <a:r>
-              <a:t>Prior work studies overthinking in chat and math settings: many reasoning tokens are spent on easy problems. (Chen et al., 2024, arXiv:2412.21187)</a:t>
+              <a:t>Prior work studies overthinking in chat and math settings </a:t>
+            </a:r>
+            <a:r>
+              <a:rPr b="0" sz="2000"/>
+              <a:t>[Chen et al., 2024]</a:t>
+            </a:r>
+          </a:p>
+          <a:p>
+            <a:pPr lvl="1"/>
+            <a:r>
+              <a:t>many reasoning tokens are spent on easy problems</a:t>
             </a:r>
           </a:p>
           <a:p>
             <a:pPr/>
             <a:r>
-              <a:t>We study the same cost problem in the agent setting.</a:t>
+              <a:t>We study the same cost problem in the agent setting</a:t>
             </a:r>
           </a:p>
           <a:p>
             <a:pPr/>
             <a:r>
-              <a:t>Key difference in the agent setting: </a:t>
+              <a:t>Key difference in the agent setting</a:t>
+            </a:r>
+          </a:p>
+          <a:p>
+            <a:pPr lvl="1"/>
+            <a:r>
+              <a:t>the next tool call is </a:t>
             </a:r>
             <a:r>
               <a:rPr b="1"/>
-              <a:t>the next tool call is a classification problem over a fixed tool set</a:t>
-            </a:r>
-            <a:r>
-              <a:t>, not open-ended generation.</a:t>
+              <a:t>a classification problem over a fixed tool set</a:t>
+            </a:r>
+            <a:r>
+              <a:t>, not open-ended generation</a:t>
             </a:r>
           </a:p>
         </p:txBody>
@@ -8266,13 +8462,23 @@
           <a:p>
             <a:pPr/>
             <a:r>
-              <a:t>A language model can learn where to insert an API call in the middle of text, and how to use the returned result in the following text. (Schick et al., 2023, arXiv:2302.04761)</a:t>
+              <a:t>A language model can learn where to insert an API call in the middle of text, and how to use the returned result in the following text </a:t>
+            </a:r>
+            <a:r>
+              <a:rPr b="0" sz="2000"/>
+              <a:t>[Schick et al., 2023]</a:t>
             </a:r>
           </a:p>
           <a:p>
             <a:pPr/>
             <a:r>
-              <a:t>Our question: can a </a:t>
+              <a:t>Our question</a:t>
+            </a:r>
+          </a:p>
+          <a:p>
+            <a:pPr lvl="1"/>
+            <a:r>
+              <a:t>can a </a:t>
             </a:r>
             <a:r>
               <a:rPr b="1"/>
@@ -8384,13 +8590,19 @@
               <a:t>1/20–1/34</a:t>
             </a:r>
             <a:r>
-              <a:t> of the agent model's inference cost) runs alongside the agent.</a:t>
+              <a:t> of the agent model's inference cost) runs alongside the agent</a:t>
             </a:r>
           </a:p>
           <a:p>
             <a:pPr lvl="1"/>
             <a:r>
-              <a:t>At each sentence boundary, the probe reads plain text: task description + recent history + reasoning prefix.</a:t>
+              <a:t>At each sentence boundary, the probe reads plain text</a:t>
+            </a:r>
+          </a:p>
+          <a:p>
+            <a:pPr lvl="2"/>
+            <a:r>
+              <a:t>task description + recent history + reasoning prefix</a:t>
             </a:r>
           </a:p>
           <a:p>
@@ -8403,7 +8615,7 @@
               <a:t>θ</a:t>
             </a:r>
             <a:r>
-              <a:t>, it outputs a prediction of the next tool.</a:t>
+              <a:t>, it outputs a prediction of the next tool</a:t>
             </a:r>
           </a:p>
         </p:txBody>
@@ -8424,8 +8636,8 @@
         </p:blipFill>
         <p:spPr>
           <a:xfrm>
-            <a:off x="3078480" y="3474720"/>
-            <a:ext cx="6035040" cy="2954655"/>
+            <a:off x="2026920" y="3566160"/>
+            <a:ext cx="8138160" cy="2839878"/>
           </a:xfrm>
           <a:prstGeom prst="rect">
             <a:avLst/>
@@ -8525,26 +8737,32 @@
           <a:p>
             <a:pPr/>
             <a:r>
-              <a:t>Official task splits (AppWorld: 90 train / 57 validation / 168 test tasks).</a:t>
+              <a:t>Official task splits</a:t>
+            </a:r>
+          </a:p>
+          <a:p>
+            <a:pPr lvl="1"/>
+            <a:r>
+              <a:t>AppWorld: 90 train / 57 validation / 168 test tasks</a:t>
             </a:r>
           </a:p>
           <a:p>
             <a:pPr/>
             <a:r>
-              <a:t>Data is split by task, so no task appears in both training and test.</a:t>
+              <a:t>Data is split by task, so no task appears in both training and test</a:t>
             </a:r>
           </a:p>
           <a:p>
             <a:pPr/>
             <a:r>
-              <a:t>All models are run with vLLM; one probe is trained per task × model pair.</a:t>
+              <a:t>All models are run with vLLM; one probe is trained per task × model pair</a:t>
             </a:r>
           </a:p>
         </p:txBody>
       </p:sp>
       <p:pic>
         <p:nvPicPr>
-          <p:cNvPr id="4" name="Picture 3" descr="fig07_setting_grid.png"/>
+          <p:cNvPr id="4" name="Picture 3" descr="fig07_setting.png"/>
           <p:cNvPicPr>
             <a:picLocks noChangeAspect="1"/>
           </p:cNvPicPr>
@@ -8558,8 +8776,8 @@
         </p:blipFill>
         <p:spPr>
           <a:xfrm>
-            <a:off x="3261360" y="4023360"/>
-            <a:ext cx="5669280" cy="2103601"/>
+            <a:off x="1798320" y="3794760"/>
+            <a:ext cx="8595360" cy="2510749"/>
           </a:xfrm>
           <a:prstGeom prst="rect">
             <a:avLst/>
@@ -8659,28 +8877,47 @@
           <a:p>
             <a:pPr/>
             <a:r>
-              <a:rPr b="1"/>
               <a:t>AppWorld</a:t>
             </a:r>
-            <a:r>
-              <a:t>: the agent operates phone apps (email, shopping, music, …) through API calls to finish everyday tasks — many distinct tools, each with its own arguments.</a:t>
+          </a:p>
+          <a:p>
+            <a:pPr lvl="1"/>
+            <a:r>
+              <a:t>the agent operates phone apps (email, shopping, music, …) through API calls to finish everyday tasks</a:t>
+            </a:r>
+          </a:p>
+          <a:p>
+            <a:pPr lvl="1"/>
+            <a:r>
+              <a:t>many distinct tools, each with its own arguments</a:t>
             </a:r>
           </a:p>
           <a:p>
             <a:pPr/>
             <a:r>
-              <a:rPr b="1"/>
               <a:t>ALFWorld</a:t>
             </a:r>
-            <a:r>
-              <a:t>: the agent acts in a text-described household (go somewhere, pick something up, put it down, …) to complete chores — few action types, repeated often.</a:t>
+          </a:p>
+          <a:p>
+            <a:pPr lvl="1"/>
+            <a:r>
+              <a:t>the agent acts in a text-described household (go somewhere, pick something up, put it down, …) to complete chores</a:t>
+            </a:r>
+          </a:p>
+          <a:p>
+            <a:pPr lvl="1"/>
+            <a:r>
+              <a:t>few action types, repeated often</a:t>
             </a:r>
           </a:p>
           <a:p>
             <a:pPr/>
             <a:r>
-              <a:t>Models: </a:t>
-            </a:r>
+              <a:t>Models</a:t>
+            </a:r>
+          </a:p>
+          <a:p>
+            <a:pPr lvl="1"/>
             <a:r>
               <a:rPr b="1"/>
               <a:t>gpt-oss-120b</a:t>
@@ -8691,9 +8928,6 @@
             <a:r>
               <a:rPr b="1"/>
               <a:t>qwen3.6-27b</a:t>
-            </a:r>
-            <a:r>
-              <a:t>.</a:t>
             </a:r>
           </a:p>
         </p:txBody>
@@ -8793,7 +9027,7 @@
               <a:buNone/>
             </a:pPr>
             <a:r>
-              <a:t>1.  Run the agent on the training tasks and record complete trajectories.</a:t>
+              <a:t>1.  Run the agent on the training tasks and record complete trajectories</a:t>
             </a:r>
           </a:p>
           <a:p>
@@ -8801,7 +9035,7 @@
               <a:buNone/>
             </a:pPr>
             <a:r>
-              <a:t>2.  Take every tool-call step; the reasoning text before the call is the raw material.</a:t>
+              <a:t>2.  Take every tool-call step; the reasoning text before the call is the raw material</a:t>
             </a:r>
           </a:p>
           <a:p>
@@ -8809,7 +9043,7 @@
               <a:buNone/>
             </a:pPr>
             <a:r>
-              <a:t>3.  Cut that reasoning text at sentence boundaries; each prefix becomes one training sample (at most 64 per step).</a:t>
+              <a:t>3.  Cut that reasoning text at sentence boundaries; each prefix becomes one training sample (at most 64 per step)</a:t>
             </a:r>
           </a:p>
           <a:p>
@@ -8817,7 +9051,7 @@
               <a:buNone/>
             </a:pPr>
             <a:r>
-              <a:t>4.  Label each sample with the tool that was actually called at that step.</a:t>
+              <a:t>4.  Label each sample with the tool that was actually called at that step</a:t>
             </a:r>
           </a:p>
         </p:txBody>
@@ -8838,14 +9072,47 @@
         </p:blipFill>
         <p:spPr>
           <a:xfrm>
-            <a:off x="3169920" y="3931920"/>
-            <a:ext cx="5852160" cy="2560320"/>
+            <a:off x="2621280" y="3931920"/>
+            <a:ext cx="6949440" cy="2273046"/>
           </a:xfrm>
           <a:prstGeom prst="rect">
             <a:avLst/>
           </a:prstGeom>
         </p:spPr>
       </p:pic>
+      <p:sp>
+        <p:nvSpPr>
+          <p:cNvPr id="5" name="TextBox 4"/>
+          <p:cNvSpPr txBox="1"/>
+          <p:nvPr/>
+        </p:nvSpPr>
+        <p:spPr>
+          <a:xfrm>
+            <a:off x="429584" y="6250000"/>
+            <a:ext cx="11365562" cy="500000"/>
+          </a:xfrm>
+          <a:prstGeom prst="rect">
+            <a:avLst/>
+          </a:prstGeom>
+          <a:noFill/>
+        </p:spPr>
+        <p:txBody>
+          <a:bodyPr wrap="square">
+            <a:spAutoFit/>
+          </a:bodyPr>
+          <a:lstStyle/>
+          <a:p>
+            <a:r>
+              <a:rPr sz="1200" i="1">
+                <a:solidFill>
+                  <a:srgbClr val="898781"/>
+                </a:solidFill>
+              </a:rPr>
+              <a:t>Sample text = task description + last 3 turns of history + reasoning prefix.</a:t>
+            </a:r>
+          </a:p>
+        </p:txBody>
+      </p:sp>
       <p:sp>
         <p:nvSpPr>
           <p:cNvPr id="4" name="灯片编号占位符 3">

--- a/talks/20260809/slides.pptx
+++ b/talks/20260809/slides.pptx
@@ -5,24 +5,23 @@
     <p:sldMasterId id="2147483648" r:id="rId1"/>
   </p:sldMasterIdLst>
   <p:notesMasterIdLst>
-    <p:notesMasterId r:id="rId10"/>
+    <p:notesMasterId r:id="rId16"/>
   </p:notesMasterIdLst>
   <p:sldIdLst>
     <p:sldId id="256" r:id="rId2"/>
-    <p:sldId id="257" r:id="rId8"/>
-    <p:sldId id="258" r:id="rId9"/>
-    <p:sldId id="259" r:id="rId7"/>
+    <p:sldId id="257" r:id="rId3"/>
+    <p:sldId id="258" r:id="rId4"/>
+    <p:sldId id="259" r:id="rId5"/>
     <p:sldId id="260" r:id="rId6"/>
-    <p:sldId id="261" r:id="rId5"/>
-    <p:sldId id="262" r:id="rId4"/>
-    <p:sldId id="263" r:id="rId3"/>
-    <p:sldId id="264" r:id="rId15"/>
-    <p:sldId id="265" r:id="rId16"/>
-    <p:sldId id="266" r:id="rId17"/>
-    <p:sldId id="267" r:id="rId18"/>
-    <p:sldId id="268" r:id="rId19"/>
-    <p:sldId id="269" r:id="rId20"/>
-    <p:sldId id="270" r:id="rId21"/>
+    <p:sldId id="261" r:id="rId7"/>
+    <p:sldId id="263" r:id="rId8"/>
+    <p:sldId id="264" r:id="rId9"/>
+    <p:sldId id="265" r:id="rId10"/>
+    <p:sldId id="266" r:id="rId11"/>
+    <p:sldId id="267" r:id="rId12"/>
+    <p:sldId id="268" r:id="rId13"/>
+    <p:sldId id="269" r:id="rId14"/>
+    <p:sldId id="270" r:id="rId15"/>
   </p:sldIdLst>
   <p:sldSz cx="12192000" cy="6858000"/>
   <p:notesSz cx="6858000" cy="9144000"/>
@@ -6876,7 +6875,7 @@
         </p:nvSpPr>
         <p:spPr>
           <a:xfrm>
-            <a:off x="517411" y="1743134"/>
+            <a:off x="517411" y="2100883"/>
             <a:ext cx="11157177" cy="2298453"/>
           </a:xfrm>
         </p:spPr>
@@ -6886,6 +6885,27 @@
           </a:bodyPr>
           <a:lstStyle/>
           <a:p>
+            <a:r>
+              <a:rPr kumimoji="1" lang="en-US" altLang="zh-CN" sz="4100" b="1" dirty="0">
+                <a:solidFill>
+                  <a:schemeClr val="bg1">
+                    <a:lumMod val="95000"/>
+                  </a:schemeClr>
+                </a:solidFill>
+                <a:latin typeface="Avenir Heavy" panose="02000503020000020003" pitchFamily="2" charset="0"/>
+              </a:rPr>
+              <a:t>Progress Report</a:t>
+            </a:r>
+            <a:br>
+              <a:rPr kumimoji="1" lang="en-US" altLang="zh-CN" sz="4100" b="1" dirty="0">
+                <a:solidFill>
+                  <a:schemeClr val="bg1">
+                    <a:lumMod val="95000"/>
+                  </a:schemeClr>
+                </a:solidFill>
+                <a:latin typeface="Avenir Heavy" panose="02000503020000020003" pitchFamily="2" charset="0"/>
+              </a:rPr>
+            </a:br>
             <a:r>
               <a:rPr kumimoji="1" lang="en-US" altLang="zh-CN" sz="4100" b="1" dirty="0">
                 <a:solidFill>
@@ -6933,7 +6953,7 @@
         <p:spPr>
           <a:xfrm>
             <a:off x="-2492079" y="4399336"/>
-            <a:ext cx="16847472" cy="1323439"/>
+            <a:ext cx="16847472" cy="1015663"/>
           </a:xfrm>
           <a:prstGeom prst="rect">
             <a:avLst/>
@@ -6952,7 +6972,7 @@
                 <a:latin typeface="Avenir Book" panose="02000503020000020003" pitchFamily="2" charset="0"/>
                 <a:ea typeface="Segoe UI Symbol" panose="020B0502040204020203" pitchFamily="34" charset="0"/>
               </a:rPr>
-              <a:t>A lightweight probe predicts the tool call before the reasoning is finished</a:t>
+              <a:t>predicts the tool call before the reasoning is finished</a:t>
             </a:r>
           </a:p>
           <a:p>
@@ -6962,17 +6982,7 @@
                 <a:latin typeface="Avenir Book" panose="02000503020000020003" pitchFamily="2" charset="0"/>
                 <a:ea typeface="Segoe UI Symbol" panose="020B0502040204020203" pitchFamily="34" charset="0"/>
               </a:rPr>
-              <a:t>Work-in-progress report</a:t>
-            </a:r>
-          </a:p>
-          <a:p>
-            <a:pPr algn="ctr"/>
-            <a:r>
-              <a:rPr kumimoji="1" lang="en-US" altLang="zh-CN" sz="2000" dirty="0" err="1">
-                <a:latin typeface="Avenir Book" panose="02000503020000020003" pitchFamily="2" charset="0"/>
-                <a:ea typeface="Segoe UI Symbol" panose="020B0502040204020203" pitchFamily="34" charset="0"/>
-              </a:rPr>
-              <a:t>y-guo</a:t>
+              <a:t>Guo Yibo</a:t>
             </a:r>
           </a:p>
           <a:p>
@@ -7001,7 +7011,7 @@
 </file>
 
 <file path=ppt/slides/slide10.xml><?xml version="1.0" encoding="utf-8"?>
-<p:sld xmlns:a="http://schemas.openxmlformats.org/drawingml/2006/main" xmlns:p="http://schemas.openxmlformats.org/presentationml/2006/main" xmlns:r="http://schemas.openxmlformats.org/officeDocument/2006/relationships">
+<p:sld xmlns:a="http://schemas.openxmlformats.org/drawingml/2006/main" xmlns:r="http://schemas.openxmlformats.org/officeDocument/2006/relationships" xmlns:p="http://schemas.openxmlformats.org/presentationml/2006/main">
   <p:cSld>
     <p:spTree>
       <p:nvGrpSpPr>
@@ -7009,7 +7019,14 @@
         <p:cNvGrpSpPr/>
         <p:nvPr/>
       </p:nvGrpSpPr>
-      <p:grpSpPr/>
+      <p:grpSpPr>
+        <a:xfrm>
+          <a:off x="0" y="0"/>
+          <a:ext cx="0" cy="0"/>
+          <a:chOff x="0" y="0"/>
+          <a:chExt cx="0" cy="0"/>
+        </a:xfrm>
+      </p:grpSpPr>
       <p:sp>
         <p:nvSpPr>
           <p:cNvPr id="2" name="Title 1"/>
@@ -7026,7 +7043,7 @@
           <a:lstStyle/>
           <a:p>
             <a:r>
-              <a:t>Probe training</a:t>
+              <a:t>Main result: precision and coverage</a:t>
             </a:r>
           </a:p>
         </p:txBody>
@@ -7048,40 +7065,36 @@
           </a:bodyPr>
           <a:lstStyle/>
           <a:p>
-            <a:pPr/>
-            <a:r>
-              <a:t>Qwen3-0.6B-Base, full fine-tuning, with a linear classification head over tool names</a:t>
+            <a:r>
+              <a:rPr dirty="0"/>
+              <a:t>We choose θ on a validation split so that precision reaches </a:t>
+            </a:r>
+            <a:r>
+              <a:rPr b="1" dirty="0"/>
+              <a:t>~0.95</a:t>
+            </a:r>
+            <a:r>
+              <a:rPr dirty="0"/>
+              <a:t>, then freeze it</a:t>
             </a:r>
           </a:p>
           <a:p>
             <a:pPr lvl="1"/>
             <a:r>
-              <a:t>One forward pass per event, with supervision at every sentence-boundary position</a:t>
-            </a:r>
-          </a:p>
-          <a:p>
-            <a:pPr lvl="1"/>
-            <a:r>
-              <a:t>Each position is weighted 1/mᵢ, so the training distribution matches deployment, where the probe is queried at every sentence boundary</a:t>
-            </a:r>
-          </a:p>
-          <a:p>
-            <a:pPr lvl="2"/>
-            <a:r>
-              <a:t>Learning rate 1e-5 · 3 epochs · max length 4,096 with left truncation (the end of the reasoning is kept) · fp32 weights with bf16 computation · fixed random seed</a:t>
-            </a:r>
-          </a:p>
-          <a:p>
-            <a:pPr lvl="1"/>
-            <a:r>
-              <a:t>Baseline probe: ModernBERT-base (150M), same procedure</a:t>
-            </a:r>
-          </a:p>
-        </p:txBody>
-      </p:sp>
-      <p:sp>
-        <p:nvSpPr>
-          <p:cNvPr id="4" name="灯片编号占位符 3">
+              <a:rPr dirty="0"/>
+              <a:t>Coverage is </a:t>
+            </a:r>
+            <a:r>
+              <a:rPr lang="en-US" dirty="0"/>
+              <a:t>how many token </a:t>
+            </a:r>
+            <a:endParaRPr dirty="0"/>
+          </a:p>
+        </p:txBody>
+      </p:sp>
+      <p:sp>
+        <p:nvSpPr>
+          <p:cNvPr id="6" name="灯片编号占位符 3">
             <a:extLst>
               <a:ext uri="{FF2B5EF4-FFF2-40B4-BE49-F238E27FC236}">
                 <a16:creationId xmlns:a16="http://schemas.microsoft.com/office/drawing/2014/main" id="{D5F8A530-4697-122E-23FB-8806DC45D145}"/>
@@ -7108,104 +7121,22 @@
             <a:fld id="{915DC352-AA18-B54F-943B-0795FAAB114B}" type="slidenum">
               <a:rPr lang="en-US" altLang="zh-CN" smtClean="0"/>
               <a:pPr/>
-              <a:t>1</a:t>
+              <a:t>9</a:t>
             </a:fld>
             <a:endParaRPr lang="en-US" dirty="0"/>
           </a:p>
         </p:txBody>
       </p:sp>
-    </p:spTree>
-  </p:cSld>
-  <p:clrMapOvr>
-    <a:masterClrMapping/>
-  </p:clrMapOvr>
-</p:sld>
-</file>
-
-<file path=ppt/slides/slide11.xml><?xml version="1.0" encoding="utf-8"?>
-<p:sld xmlns:a="http://schemas.openxmlformats.org/drawingml/2006/main" xmlns:p="http://schemas.openxmlformats.org/presentationml/2006/main" xmlns:r="http://schemas.openxmlformats.org/officeDocument/2006/relationships">
-  <p:cSld>
-    <p:spTree>
-      <p:nvGrpSpPr>
-        <p:cNvPr id="1" name=""/>
-        <p:cNvGrpSpPr/>
-        <p:nvPr/>
-      </p:nvGrpSpPr>
-      <p:grpSpPr/>
-      <p:sp>
-        <p:nvSpPr>
-          <p:cNvPr id="2" name="Title 1"/>
-          <p:cNvSpPr>
-            <a:spLocks noGrp="1"/>
-          </p:cNvSpPr>
-          <p:nvPr>
-            <p:ph type="title"/>
-          </p:nvPr>
-        </p:nvSpPr>
-        <p:spPr/>
-        <p:txBody>
-          <a:bodyPr/>
-          <a:lstStyle/>
-          <a:p>
-            <a:r>
-              <a:t>Main result: precision and coverage</a:t>
-            </a:r>
-          </a:p>
-        </p:txBody>
-      </p:sp>
-      <p:sp>
-        <p:nvSpPr>
-          <p:cNvPr id="3" name="Content Placeholder 2"/>
-          <p:cNvSpPr>
-            <a:spLocks noGrp="1"/>
-          </p:cNvSpPr>
-          <p:nvPr>
-            <p:ph idx="1"/>
-          </p:nvPr>
-        </p:nvSpPr>
-        <p:spPr/>
-        <p:txBody>
-          <a:bodyPr>
-            <a:normAutofit/>
-          </a:bodyPr>
-          <a:lstStyle/>
-          <a:p>
-            <a:pPr/>
-            <a:r>
-              <a:t>We choose θ on a validation split so that precision reaches </a:t>
-            </a:r>
-            <a:r>
-              <a:rPr b="1"/>
-              <a:t>~0.95</a:t>
-            </a:r>
-            <a:r>
-              <a:t>, then freeze it</a:t>
-            </a:r>
-          </a:p>
-          <a:p>
-            <a:pPr lvl="1"/>
-            <a:r>
-              <a:t>Coverage is what remains</a:t>
-            </a:r>
-          </a:p>
-          <a:p>
-            <a:pPr lvl="2"/>
-            <a:r>
-              <a:t>the fraction of events where the probe is still confident enough to predict</a:t>
-            </a:r>
-          </a:p>
-        </p:txBody>
-      </p:sp>
       <p:pic>
         <p:nvPicPr>
-          <p:cNvPr id="4" name="Picture 3" descr="fig11_results_table.png"/>
+          <p:cNvPr id="7" name="Picture 6" descr="fig11_results_table.png"/>
           <p:cNvPicPr>
             <a:picLocks noChangeAspect="1"/>
           </p:cNvPicPr>
           <p:nvPr/>
         </p:nvPicPr>
         <p:blipFill>
-          <a:blip r:embed="rId2"/>
+          <a:blip r:embed="rId3"/>
           <a:stretch>
             <a:fillRect/>
           </a:stretch>
@@ -7220,74 +7151,6 @@
           </a:prstGeom>
         </p:spPr>
       </p:pic>
-      <p:sp>
-        <p:nvSpPr>
-          <p:cNvPr id="5" name="TextBox 4"/>
-          <p:cNvSpPr txBox="1"/>
-          <p:nvPr/>
-        </p:nvSpPr>
-        <p:spPr>
-          <a:xfrm>
-            <a:off x="429584" y="6250000"/>
-            <a:ext cx="11365562" cy="500000"/>
-          </a:xfrm>
-          <a:prstGeom prst="rect">
-            <a:avLst/>
-          </a:prstGeom>
-          <a:noFill/>
-        </p:spPr>
-        <p:txBody>
-          <a:bodyPr wrap="square">
-            <a:spAutoFit/>
-          </a:bodyPr>
-          <a:lstStyle/>
-          <a:p>
-            <a:r>
-              <a:rPr sz="1200" i="1">
-                <a:solidFill>
-                  <a:srgbClr val="898781"/>
-                </a:solidFill>
-              </a:rPr>
-              <a:t>The AppWorld × qwen3.6 row uses the 0.90 precision target (no θ reached 0.95); all other rows use the 0.95 target. Precision is computed only on events where the probe made a prediction.</a:t>
-            </a:r>
-          </a:p>
-        </p:txBody>
-      </p:sp>
-      <p:sp>
-        <p:nvSpPr>
-          <p:cNvPr id="4" name="灯片编号占位符 3">
-            <a:extLst>
-              <a:ext uri="{FF2B5EF4-FFF2-40B4-BE49-F238E27FC236}">
-                <a16:creationId xmlns:a16="http://schemas.microsoft.com/office/drawing/2014/main" id="{D5F8A530-4697-122E-23FB-8806DC45D145}"/>
-              </a:ext>
-            </a:extLst>
-          </p:cNvPr>
-          <p:cNvSpPr>
-            <a:spLocks noGrp="1"/>
-          </p:cNvSpPr>
-          <p:nvPr>
-            <p:ph type="sldNum" sz="quarter" idx="12"/>
-          </p:nvPr>
-        </p:nvSpPr>
-        <p:spPr>
-          <a:xfrm>
-            <a:off x="9389988" y="6417719"/>
-            <a:ext cx="2743200" cy="365125"/>
-          </a:xfrm>
-        </p:spPr>
-        <p:txBody>
-          <a:bodyPr/>
-          <a:lstStyle/>
-          <a:p>
-            <a:fld id="{915DC352-AA18-B54F-943B-0795FAAB114B}" type="slidenum">
-              <a:rPr lang="en-US" altLang="zh-CN" smtClean="0"/>
-              <a:pPr/>
-              <a:t>1</a:t>
-            </a:fld>
-            <a:endParaRPr lang="en-US" dirty="0"/>
-          </a:p>
-        </p:txBody>
-      </p:sp>
     </p:spTree>
   </p:cSld>
   <p:clrMapOvr>
@@ -7296,8 +7159,8 @@
 </p:sld>
 </file>
 
-<file path=ppt/slides/slide12.xml><?xml version="1.0" encoding="utf-8"?>
-<p:sld xmlns:a="http://schemas.openxmlformats.org/drawingml/2006/main" xmlns:p="http://schemas.openxmlformats.org/presentationml/2006/main" xmlns:r="http://schemas.openxmlformats.org/officeDocument/2006/relationships">
+<file path=ppt/slides/slide11.xml><?xml version="1.0" encoding="utf-8"?>
+<p:sld xmlns:a="http://schemas.openxmlformats.org/drawingml/2006/main" xmlns:r="http://schemas.openxmlformats.org/officeDocument/2006/relationships" xmlns:p="http://schemas.openxmlformats.org/presentationml/2006/main">
   <p:cSld>
     <p:spTree>
       <p:nvGrpSpPr>
@@ -7305,7 +7168,14 @@
         <p:cNvGrpSpPr/>
         <p:nvPr/>
       </p:nvGrpSpPr>
-      <p:grpSpPr/>
+      <p:grpSpPr>
+        <a:xfrm>
+          <a:off x="0" y="0"/>
+          <a:ext cx="0" cy="0"/>
+          <a:chOff x="0" y="0"/>
+          <a:chExt cx="0" cy="0"/>
+        </a:xfrm>
+      </p:grpSpPr>
       <p:sp>
         <p:nvSpPr>
           <p:cNvPr id="2" name="Title 1"/>
@@ -7344,7 +7214,6 @@
           </a:bodyPr>
           <a:lstStyle/>
           <a:p>
-            <a:pPr/>
             <a:r>
               <a:t>Higher θ</a:t>
             </a:r>
@@ -7356,7 +7225,6 @@
             </a:r>
           </a:p>
           <a:p>
-            <a:pPr/>
             <a:r>
               <a:t>θ is chosen according to the acceptable error rate</a:t>
             </a:r>
@@ -7422,7 +7290,7 @@
       </p:sp>
       <p:sp>
         <p:nvSpPr>
-          <p:cNvPr id="4" name="灯片编号占位符 3">
+          <p:cNvPr id="6" name="灯片编号占位符 3">
             <a:extLst>
               <a:ext uri="{FF2B5EF4-FFF2-40B4-BE49-F238E27FC236}">
                 <a16:creationId xmlns:a16="http://schemas.microsoft.com/office/drawing/2014/main" id="{D5F8A530-4697-122E-23FB-8806DC45D145}"/>
@@ -7449,7 +7317,7 @@
             <a:fld id="{915DC352-AA18-B54F-943B-0795FAAB114B}" type="slidenum">
               <a:rPr lang="en-US" altLang="zh-CN" smtClean="0"/>
               <a:pPr/>
-              <a:t>1</a:t>
+              <a:t>10</a:t>
             </a:fld>
             <a:endParaRPr lang="en-US" dirty="0"/>
           </a:p>
@@ -7463,8 +7331,8 @@
 </p:sld>
 </file>
 
-<file path=ppt/slides/slide13.xml><?xml version="1.0" encoding="utf-8"?>
-<p:sld xmlns:a="http://schemas.openxmlformats.org/drawingml/2006/main" xmlns:p="http://schemas.openxmlformats.org/presentationml/2006/main" xmlns:r="http://schemas.openxmlformats.org/officeDocument/2006/relationships">
+<file path=ppt/slides/slide12.xml><?xml version="1.0" encoding="utf-8"?>
+<p:sld xmlns:a="http://schemas.openxmlformats.org/drawingml/2006/main" xmlns:r="http://schemas.openxmlformats.org/officeDocument/2006/relationships" xmlns:p="http://schemas.openxmlformats.org/presentationml/2006/main">
   <p:cSld>
     <p:spTree>
       <p:nvGrpSpPr>
@@ -7472,7 +7340,14 @@
         <p:cNvGrpSpPr/>
         <p:nvPr/>
       </p:nvGrpSpPr>
-      <p:grpSpPr/>
+      <p:grpSpPr>
+        <a:xfrm>
+          <a:off x="0" y="0"/>
+          <a:ext cx="0" cy="0"/>
+          <a:chOff x="0" y="0"/>
+          <a:chExt cx="0" cy="0"/>
+        </a:xfrm>
+      </p:grpSpPr>
       <p:sp>
         <p:nvSpPr>
           <p:cNvPr id="2" name="Title 1"/>
@@ -7485,7 +7360,9 @@
         </p:nvSpPr>
         <p:spPr/>
         <p:txBody>
-          <a:bodyPr/>
+          <a:bodyPr>
+            <a:normAutofit fontScale="90000"/>
+          </a:bodyPr>
           <a:lstStyle/>
           <a:p>
             <a:r>
@@ -7511,46 +7388,59 @@
           </a:bodyPr>
           <a:lstStyle/>
           <a:p>
-            <a:pPr/>
-            <a:r>
+            <a:r>
+              <a:rPr dirty="0"/>
               <a:t>Earliness </a:t>
             </a:r>
             <a:r>
-              <a:rPr b="1"/>
+              <a:rPr b="1" dirty="0"/>
               <a:t>0.58–0.84</a:t>
             </a:r>
             <a:r>
+              <a:rPr dirty="0"/>
               <a:t> (higher = earlier)</a:t>
             </a:r>
           </a:p>
           <a:p>
             <a:pPr lvl="1"/>
             <a:r>
+              <a:rPr dirty="0"/>
               <a:t>predictions happen well before the reasoning is finished</a:t>
             </a:r>
           </a:p>
           <a:p>
-            <a:pPr/>
-            <a:r>
+            <a:r>
+              <a:rPr dirty="0"/>
               <a:t>Ablation</a:t>
             </a:r>
           </a:p>
           <a:p>
             <a:pPr lvl="1"/>
             <a:r>
+              <a:rPr dirty="0"/>
               <a:t>removing the reasoning text from the input drops the calibration-split weighted accuracy from </a:t>
             </a:r>
             <a:r>
-              <a:rPr b="1"/>
+              <a:rPr b="1" dirty="0"/>
               <a:t>0.613 to 0.421</a:t>
             </a:r>
             <a:r>
-              <a:t> (AppWorld)</a:t>
+              <a:rPr dirty="0"/>
+              <a:t> (</a:t>
+            </a:r>
+            <a:r>
+              <a:rPr dirty="0" err="1"/>
+              <a:t>AppWorld</a:t>
+            </a:r>
+            <a:r>
+              <a:rPr dirty="0"/>
+              <a:t>)</a:t>
             </a:r>
           </a:p>
           <a:p>
             <a:pPr lvl="1"/>
             <a:r>
+              <a:rPr dirty="0"/>
               <a:t>the prediction depends on the reasoning text, not on the task description alone</a:t>
             </a:r>
           </a:p>
@@ -7572,8 +7462,8 @@
         </p:blipFill>
         <p:spPr>
           <a:xfrm>
-            <a:off x="4221480" y="3794760"/>
-            <a:ext cx="3749039" cy="2436875"/>
+            <a:off x="4078339" y="3794760"/>
+            <a:ext cx="4035322" cy="2622959"/>
           </a:xfrm>
           <a:prstGeom prst="rect">
             <a:avLst/>
@@ -7582,34 +7472,122 @@
       </p:pic>
       <p:sp>
         <p:nvSpPr>
-          <p:cNvPr id="5" name="TextBox 4"/>
-          <p:cNvSpPr txBox="1"/>
-          <p:nvPr/>
+          <p:cNvPr id="6" name="灯片编号占位符 3">
+            <a:extLst>
+              <a:ext uri="{FF2B5EF4-FFF2-40B4-BE49-F238E27FC236}">
+                <a16:creationId xmlns:a16="http://schemas.microsoft.com/office/drawing/2014/main" id="{D5F8A530-4697-122E-23FB-8806DC45D145}"/>
+              </a:ext>
+            </a:extLst>
+          </p:cNvPr>
+          <p:cNvSpPr>
+            <a:spLocks noGrp="1"/>
+          </p:cNvSpPr>
+          <p:nvPr>
+            <p:ph type="sldNum" sz="quarter" idx="12"/>
+          </p:nvPr>
         </p:nvSpPr>
         <p:spPr>
           <a:xfrm>
-            <a:off x="429584" y="6250000"/>
-            <a:ext cx="11365562" cy="500000"/>
+            <a:off x="9389988" y="6417719"/>
+            <a:ext cx="2743200" cy="365125"/>
           </a:xfrm>
-          <a:prstGeom prst="rect">
-            <a:avLst/>
-          </a:prstGeom>
-          <a:noFill/>
         </p:spPr>
         <p:txBody>
-          <a:bodyPr wrap="square">
-            <a:spAutoFit/>
+          <a:bodyPr/>
+          <a:lstStyle/>
+          <a:p>
+            <a:fld id="{915DC352-AA18-B54F-943B-0795FAAB114B}" type="slidenum">
+              <a:rPr lang="en-US" altLang="zh-CN" smtClean="0"/>
+              <a:pPr/>
+              <a:t>11</a:t>
+            </a:fld>
+            <a:endParaRPr lang="en-US" dirty="0"/>
+          </a:p>
+        </p:txBody>
+      </p:sp>
+    </p:spTree>
+  </p:cSld>
+  <p:clrMapOvr>
+    <a:masterClrMapping/>
+  </p:clrMapOvr>
+</p:sld>
+</file>
+
+<file path=ppt/slides/slide13.xml><?xml version="1.0" encoding="utf-8"?>
+<p:sld xmlns:a="http://schemas.openxmlformats.org/drawingml/2006/main" xmlns:r="http://schemas.openxmlformats.org/officeDocument/2006/relationships" xmlns:p="http://schemas.openxmlformats.org/presentationml/2006/main">
+  <p:cSld>
+    <p:spTree>
+      <p:nvGrpSpPr>
+        <p:cNvPr id="1" name=""/>
+        <p:cNvGrpSpPr/>
+        <p:nvPr/>
+      </p:nvGrpSpPr>
+      <p:grpSpPr>
+        <a:xfrm>
+          <a:off x="0" y="0"/>
+          <a:ext cx="0" cy="0"/>
+          <a:chOff x="0" y="0"/>
+          <a:chExt cx="0" cy="0"/>
+        </a:xfrm>
+      </p:grpSpPr>
+      <p:sp>
+        <p:nvSpPr>
+          <p:cNvPr id="2" name="Title 1"/>
+          <p:cNvSpPr>
+            <a:spLocks noGrp="1"/>
+          </p:cNvSpPr>
+          <p:nvPr>
+            <p:ph type="title"/>
+          </p:nvPr>
+        </p:nvSpPr>
+        <p:spPr/>
+        <p:txBody>
+          <a:bodyPr/>
+          <a:lstStyle/>
+          <a:p>
+            <a:r>
+              <a:t>Summary of current results</a:t>
+            </a:r>
+          </a:p>
+        </p:txBody>
+      </p:sp>
+      <p:sp>
+        <p:nvSpPr>
+          <p:cNvPr id="3" name="Content Placeholder 2"/>
+          <p:cNvSpPr>
+            <a:spLocks noGrp="1"/>
+          </p:cNvSpPr>
+          <p:nvPr>
+            <p:ph idx="1"/>
+          </p:nvPr>
+        </p:nvSpPr>
+        <p:spPr>
+          <a:xfrm>
+            <a:off x="429584" y="1225549"/>
+            <a:ext cx="11365562" cy="2594611"/>
+          </a:xfrm>
+        </p:spPr>
+        <p:txBody>
+          <a:bodyPr anchor="ctr">
+            <a:normAutofit/>
           </a:bodyPr>
           <a:lstStyle/>
           <a:p>
             <a:r>
-              <a:rPr sz="1200" i="1">
-                <a:solidFill>
-                  <a:srgbClr val="898781"/>
-                </a:solidFill>
-              </a:rPr>
-              <a:t>The ablation was run on an earlier dataset version with the ModernBERT probe: the direction of the effect is the result; absolute numbers are not comparable to page 11.</a:t>
-            </a:r>
+              <a:rPr sz="3000" dirty="0"/>
+              <a:t>On 30%–100% of events (depending on the task), the next tool can be predicted with ≥ 94% precision, well before the reasoning is finished</a:t>
+            </a:r>
+            <a:endParaRPr lang="en-US" sz="3000" dirty="0"/>
+          </a:p>
+          <a:p>
+            <a:r>
+              <a:rPr lang="en-US" sz="3000" dirty="0"/>
+              <a:t>Transformers is better that BERT, on both cost and performance</a:t>
+            </a:r>
+            <a:endParaRPr sz="3000" dirty="0"/>
+          </a:p>
+          <a:p>
+            <a:endParaRPr sz="3000" dirty="0"/>
           </a:p>
         </p:txBody>
       </p:sp>
@@ -7642,7 +7620,7 @@
             <a:fld id="{915DC352-AA18-B54F-943B-0795FAAB114B}" type="slidenum">
               <a:rPr lang="en-US" altLang="zh-CN" smtClean="0"/>
               <a:pPr/>
-              <a:t>1</a:t>
+              <a:t>12</a:t>
             </a:fld>
             <a:endParaRPr lang="en-US" dirty="0"/>
           </a:p>
@@ -7657,7 +7635,7 @@
 </file>
 
 <file path=ppt/slides/slide14.xml><?xml version="1.0" encoding="utf-8"?>
-<p:sld xmlns:a="http://schemas.openxmlformats.org/drawingml/2006/main" xmlns:p="http://schemas.openxmlformats.org/presentationml/2006/main" xmlns:r="http://schemas.openxmlformats.org/officeDocument/2006/relationships">
+<p:sld xmlns:a="http://schemas.openxmlformats.org/drawingml/2006/main" xmlns:r="http://schemas.openxmlformats.org/officeDocument/2006/relationships" xmlns:p="http://schemas.openxmlformats.org/presentationml/2006/main">
   <p:cSld>
     <p:spTree>
       <p:nvGrpSpPr>
@@ -7665,7 +7643,14 @@
         <p:cNvGrpSpPr/>
         <p:nvPr/>
       </p:nvGrpSpPr>
-      <p:grpSpPr/>
+      <p:grpSpPr>
+        <a:xfrm>
+          <a:off x="0" y="0"/>
+          <a:ext cx="0" cy="0"/>
+          <a:chOff x="0" y="0"/>
+          <a:chExt cx="0" cy="0"/>
+        </a:xfrm>
+      </p:grpSpPr>
       <p:sp>
         <p:nvSpPr>
           <p:cNvPr id="2" name="Title 1"/>
@@ -7682,7 +7667,7 @@
           <a:lstStyle/>
           <a:p>
             <a:r>
-              <a:t>Summary of current results</a:t>
+              <a:t>Future work: three directions</a:t>
             </a:r>
           </a:p>
         </p:txBody>
@@ -7699,38 +7684,65 @@
         </p:nvSpPr>
         <p:spPr/>
         <p:txBody>
-          <a:bodyPr anchor="ctr">
+          <a:bodyPr>
             <a:normAutofit/>
           </a:bodyPr>
           <a:lstStyle/>
           <a:p>
-            <a:pPr algn="ctr">
-              <a:buNone/>
-            </a:pPr>
-            <a:r>
-              <a:rPr sz="3000"/>
-              <a:t>On 30%–100% of events (depending on the task), the next tool can be predicted with ≥ 94% precision, well before the reasoning is finished.</a:t>
-            </a:r>
-          </a:p>
-          <a:p>
-            <a:pPr algn="ctr">
-              <a:buNone/>
-            </a:pPr>
-            <a:r>
-              <a:t/>
-            </a:r>
-          </a:p>
-          <a:p>
-            <a:pPr algn="ctr">
-              <a:buNone/>
-            </a:pPr>
-            <a:r>
-              <a:rPr sz="1600">
-                <a:solidFill>
-                  <a:srgbClr val="898781"/>
-                </a:solidFill>
-              </a:rPr>
-              <a:t>precision and coverage (p. 11)  ·  trade-off over θ (p. 12)  ·  earliness and ablation (p. 13)</a:t>
+            <a:r>
+              <a:t>Injection</a:t>
+            </a:r>
+          </a:p>
+          <a:p>
+            <a:pPr lvl="1"/>
+            <a:r>
+              <a:t>execute the predicted call early and feed it back to the agent</a:t>
+            </a:r>
+          </a:p>
+          <a:p>
+            <a:pPr lvl="2"/>
+            <a:r>
+              <a:t>where to insert it: into the ongoing chain of thought, or elsewhere in the context</a:t>
+            </a:r>
+          </a:p>
+          <a:p>
+            <a:pPr lvl="2"/>
+            <a:r>
+              <a:t>whether to hand the model the tool result before it asks for it</a:t>
+            </a:r>
+          </a:p>
+          <a:p>
+            <a:r>
+              <a:t>Predicting the arguments</a:t>
+            </a:r>
+          </a:p>
+          <a:p>
+            <a:pPr lvl="1"/>
+            <a:r>
+              <a:t>beyond the tool name</a:t>
+            </a:r>
+          </a:p>
+          <a:p>
+            <a:pPr lvl="2"/>
+            <a:r>
+              <a:t>extract argument values from the text, or fix the tool name and let the agent model write the arguments</a:t>
+            </a:r>
+          </a:p>
+          <a:p>
+            <a:r>
+              <a:t>Tool types</a:t>
+            </a:r>
+          </a:p>
+          <a:p>
+            <a:pPr lvl="1"/>
+            <a:r>
+              <a:t>handle read-only and state-changing tools differently</a:t>
+            </a:r>
+          </a:p>
+          <a:p>
+            <a:pPr lvl="2"/>
+            <a:r>
+              <a:t>early execution is safe for read-only tools, not for state-changing ones</a:t>
             </a:r>
           </a:p>
         </p:txBody>
@@ -7764,159 +7776,7 @@
             <a:fld id="{915DC352-AA18-B54F-943B-0795FAAB114B}" type="slidenum">
               <a:rPr lang="en-US" altLang="zh-CN" smtClean="0"/>
               <a:pPr/>
-              <a:t>1</a:t>
-            </a:fld>
-            <a:endParaRPr lang="en-US" dirty="0"/>
-          </a:p>
-        </p:txBody>
-      </p:sp>
-    </p:spTree>
-  </p:cSld>
-  <p:clrMapOvr>
-    <a:masterClrMapping/>
-  </p:clrMapOvr>
-</p:sld>
-</file>
-
-<file path=ppt/slides/slide15.xml><?xml version="1.0" encoding="utf-8"?>
-<p:sld xmlns:a="http://schemas.openxmlformats.org/drawingml/2006/main" xmlns:p="http://schemas.openxmlformats.org/presentationml/2006/main" xmlns:r="http://schemas.openxmlformats.org/officeDocument/2006/relationships">
-  <p:cSld>
-    <p:spTree>
-      <p:nvGrpSpPr>
-        <p:cNvPr id="1" name=""/>
-        <p:cNvGrpSpPr/>
-        <p:nvPr/>
-      </p:nvGrpSpPr>
-      <p:grpSpPr/>
-      <p:sp>
-        <p:nvSpPr>
-          <p:cNvPr id="2" name="Title 1"/>
-          <p:cNvSpPr>
-            <a:spLocks noGrp="1"/>
-          </p:cNvSpPr>
-          <p:nvPr>
-            <p:ph type="title"/>
-          </p:nvPr>
-        </p:nvSpPr>
-        <p:spPr/>
-        <p:txBody>
-          <a:bodyPr/>
-          <a:lstStyle/>
-          <a:p>
-            <a:r>
-              <a:t>Future work: three directions</a:t>
-            </a:r>
-          </a:p>
-        </p:txBody>
-      </p:sp>
-      <p:sp>
-        <p:nvSpPr>
-          <p:cNvPr id="3" name="Content Placeholder 2"/>
-          <p:cNvSpPr>
-            <a:spLocks noGrp="1"/>
-          </p:cNvSpPr>
-          <p:nvPr>
-            <p:ph idx="1"/>
-          </p:nvPr>
-        </p:nvSpPr>
-        <p:spPr/>
-        <p:txBody>
-          <a:bodyPr>
-            <a:normAutofit/>
-          </a:bodyPr>
-          <a:lstStyle/>
-          <a:p>
-            <a:pPr/>
-            <a:r>
-              <a:t>Injection</a:t>
-            </a:r>
-          </a:p>
-          <a:p>
-            <a:pPr lvl="1"/>
-            <a:r>
-              <a:t>execute the predicted call early and feed it back to the agent</a:t>
-            </a:r>
-          </a:p>
-          <a:p>
-            <a:pPr lvl="2"/>
-            <a:r>
-              <a:t>where to insert it: into the ongoing chain of thought, or elsewhere in the context</a:t>
-            </a:r>
-          </a:p>
-          <a:p>
-            <a:pPr lvl="2"/>
-            <a:r>
-              <a:t>whether to hand the model the tool result before it asks for it</a:t>
-            </a:r>
-          </a:p>
-          <a:p>
-            <a:pPr/>
-            <a:r>
-              <a:t>Predicting the arguments</a:t>
-            </a:r>
-          </a:p>
-          <a:p>
-            <a:pPr lvl="1"/>
-            <a:r>
-              <a:t>beyond the tool name</a:t>
-            </a:r>
-          </a:p>
-          <a:p>
-            <a:pPr lvl="2"/>
-            <a:r>
-              <a:t>extract argument values from the text, or fix the tool name and let the agent model write the arguments</a:t>
-            </a:r>
-          </a:p>
-          <a:p>
-            <a:pPr/>
-            <a:r>
-              <a:t>Tool types</a:t>
-            </a:r>
-          </a:p>
-          <a:p>
-            <a:pPr lvl="1"/>
-            <a:r>
-              <a:t>handle read-only and state-changing tools differently</a:t>
-            </a:r>
-          </a:p>
-          <a:p>
-            <a:pPr lvl="2"/>
-            <a:r>
-              <a:t>early execution is safe for read-only tools, not for state-changing ones</a:t>
-            </a:r>
-          </a:p>
-        </p:txBody>
-      </p:sp>
-      <p:sp>
-        <p:nvSpPr>
-          <p:cNvPr id="4" name="灯片编号占位符 3">
-            <a:extLst>
-              <a:ext uri="{FF2B5EF4-FFF2-40B4-BE49-F238E27FC236}">
-                <a16:creationId xmlns:a16="http://schemas.microsoft.com/office/drawing/2014/main" id="{D5F8A530-4697-122E-23FB-8806DC45D145}"/>
-              </a:ext>
-            </a:extLst>
-          </p:cNvPr>
-          <p:cNvSpPr>
-            <a:spLocks noGrp="1"/>
-          </p:cNvSpPr>
-          <p:nvPr>
-            <p:ph type="sldNum" sz="quarter" idx="12"/>
-          </p:nvPr>
-        </p:nvSpPr>
-        <p:spPr>
-          <a:xfrm>
-            <a:off x="9389988" y="6417719"/>
-            <a:ext cx="2743200" cy="365125"/>
-          </a:xfrm>
-        </p:spPr>
-        <p:txBody>
-          <a:bodyPr/>
-          <a:lstStyle/>
-          <a:p>
-            <a:fld id="{915DC352-AA18-B54F-943B-0795FAAB114B}" type="slidenum">
-              <a:rPr lang="en-US" altLang="zh-CN" smtClean="0"/>
-              <a:pPr/>
-              <a:t>1</a:t>
+              <a:t>13</a:t>
             </a:fld>
             <a:endParaRPr lang="en-US" dirty="0"/>
           </a:p>
@@ -7931,7 +7791,7 @@
 </file>
 
 <file path=ppt/slides/slide2.xml><?xml version="1.0" encoding="utf-8"?>
-<p:sld xmlns:a="http://schemas.openxmlformats.org/drawingml/2006/main" xmlns:p="http://schemas.openxmlformats.org/presentationml/2006/main" xmlns:r="http://schemas.openxmlformats.org/officeDocument/2006/relationships">
+<p:sld xmlns:a="http://schemas.openxmlformats.org/drawingml/2006/main" xmlns:r="http://schemas.openxmlformats.org/officeDocument/2006/relationships" xmlns:p="http://schemas.openxmlformats.org/presentationml/2006/main">
   <p:cSld>
     <p:spTree>
       <p:nvGrpSpPr>
@@ -7939,7 +7799,14 @@
         <p:cNvGrpSpPr/>
         <p:nvPr/>
       </p:nvGrpSpPr>
-      <p:grpSpPr/>
+      <p:grpSpPr>
+        <a:xfrm>
+          <a:off x="0" y="0"/>
+          <a:ext cx="0" cy="0"/>
+          <a:chOff x="0" y="0"/>
+          <a:chExt cx="0" cy="0"/>
+        </a:xfrm>
+      </p:grpSpPr>
       <p:sp>
         <p:nvSpPr>
           <p:cNvPr id="2" name="Title 1"/>
@@ -7978,21 +7845,30 @@
           </a:bodyPr>
           <a:lstStyle/>
           <a:p>
-            <a:pPr/>
-            <a:r>
+            <a:r>
+              <a:rPr dirty="0"/>
               <a:t>An agent solves a task in steps</a:t>
             </a:r>
           </a:p>
           <a:p>
             <a:pPr lvl="1"/>
             <a:r>
+              <a:rPr dirty="0"/>
               <a:t>reason → call a tool → observe the result → continue reasoning</a:t>
             </a:r>
           </a:p>
           <a:p>
-            <a:pPr/>
-            <a:r>
-              <a:t>Each step ends in one tool call; everything before it is reasoning text</a:t>
+            <a:r>
+              <a:rPr dirty="0"/>
+              <a:t>Each step ends in one tool call</a:t>
+            </a:r>
+            <a:endParaRPr lang="en-US" dirty="0"/>
+          </a:p>
+          <a:p>
+            <a:pPr lvl="1"/>
+            <a:r>
+              <a:rPr dirty="0"/>
+              <a:t>everything before it is reasoning text</a:t>
             </a:r>
           </a:p>
         </p:txBody>
@@ -8023,7 +7899,7 @@
       </p:pic>
       <p:sp>
         <p:nvSpPr>
-          <p:cNvPr id="4" name="灯片编号占位符 3">
+          <p:cNvPr id="5" name="灯片编号占位符 3">
             <a:extLst>
               <a:ext uri="{FF2B5EF4-FFF2-40B4-BE49-F238E27FC236}">
                 <a16:creationId xmlns:a16="http://schemas.microsoft.com/office/drawing/2014/main" id="{D5F8A530-4697-122E-23FB-8806DC45D145}"/>
@@ -8065,7 +7941,7 @@
 </file>
 
 <file path=ppt/slides/slide3.xml><?xml version="1.0" encoding="utf-8"?>
-<p:sld xmlns:a="http://schemas.openxmlformats.org/drawingml/2006/main" xmlns:p="http://schemas.openxmlformats.org/presentationml/2006/main" xmlns:r="http://schemas.openxmlformats.org/officeDocument/2006/relationships">
+<p:sld xmlns:a="http://schemas.openxmlformats.org/drawingml/2006/main" xmlns:r="http://schemas.openxmlformats.org/officeDocument/2006/relationships" xmlns:p="http://schemas.openxmlformats.org/presentationml/2006/main">
   <p:cSld>
     <p:spTree>
       <p:nvGrpSpPr>
@@ -8073,7 +7949,14 @@
         <p:cNvGrpSpPr/>
         <p:nvPr/>
       </p:nvGrpSpPr>
-      <p:grpSpPr/>
+      <p:grpSpPr>
+        <a:xfrm>
+          <a:off x="0" y="0"/>
+          <a:ext cx="0" cy="0"/>
+          <a:chOff x="0" y="0"/>
+          <a:chExt cx="0" cy="0"/>
+        </a:xfrm>
+      </p:grpSpPr>
       <p:sp>
         <p:nvSpPr>
           <p:cNvPr id="2" name="Title 1"/>
@@ -8112,68 +7995,84 @@
           </a:bodyPr>
           <a:lstStyle/>
           <a:p>
-            <a:pPr/>
-            <a:r>
+            <a:r>
+              <a:rPr dirty="0"/>
               <a:t>Tool agents follow the </a:t>
             </a:r>
             <a:r>
-              <a:rPr b="1"/>
+              <a:rPr b="1" dirty="0" err="1"/>
               <a:t>ReAct</a:t>
             </a:r>
             <a:r>
+              <a:rPr dirty="0"/>
               <a:t> pattern </a:t>
             </a:r>
             <a:r>
-              <a:rPr b="0" sz="2000"/>
+              <a:rPr sz="2000" b="0" dirty="0"/>
               <a:t>[Yao et al., 2022]</a:t>
             </a:r>
           </a:p>
           <a:p>
             <a:pPr lvl="1"/>
             <a:r>
+              <a:rPr dirty="0"/>
               <a:t>reasoning text makes the plan, actions get information from the environment</a:t>
             </a:r>
           </a:p>
           <a:p>
             <a:pPr lvl="1"/>
             <a:r>
+              <a:rPr dirty="0"/>
               <a:t>Median reasoning length per step: </a:t>
             </a:r>
             <a:r>
-              <a:rPr b="1"/>
+              <a:rPr b="1" dirty="0"/>
               <a:t>2,991 characters</a:t>
             </a:r>
             <a:r>
+              <a:rPr dirty="0"/>
               <a:t> (gpt-oss-120b) vs </a:t>
             </a:r>
             <a:r>
-              <a:rPr b="1"/>
+              <a:rPr b="1" dirty="0"/>
               <a:t>292</a:t>
             </a:r>
             <a:r>
+              <a:rPr dirty="0"/>
               <a:t> (qwen3.6-27b)</a:t>
             </a:r>
           </a:p>
           <a:p>
             <a:pPr lvl="1"/>
             <a:r>
-              <a:t>One evaluation run over 168 AppWorld tasks: </a:t>
-            </a:r>
-            <a:r>
-              <a:rPr b="1"/>
+              <a:rPr dirty="0"/>
+              <a:t>One evaluation run over 168 </a:t>
+            </a:r>
+            <a:r>
+              <a:rPr dirty="0" err="1"/>
+              <a:t>AppWorld</a:t>
+            </a:r>
+            <a:r>
+              <a:rPr dirty="0"/>
+              <a:t> tasks: </a:t>
+            </a:r>
+            <a:r>
+              <a:rPr b="1" dirty="0"/>
               <a:t>3.3M–5.7M tokens</a:t>
             </a:r>
           </a:p>
           <a:p>
             <a:pPr lvl="1"/>
             <a:r>
+              <a:rPr dirty="0"/>
               <a:t>Some single steps reach the </a:t>
             </a:r>
             <a:r>
-              <a:rPr b="1"/>
+              <a:rPr b="1" dirty="0"/>
               <a:t>8,192-token</a:t>
             </a:r>
             <a:r>
+              <a:rPr dirty="0"/>
               <a:t> generation limit</a:t>
             </a:r>
           </a:p>
@@ -8195,7 +8094,7 @@
         </p:blipFill>
         <p:spPr>
           <a:xfrm>
-            <a:off x="1798320" y="3977639"/>
+            <a:off x="1717040" y="3922309"/>
             <a:ext cx="8595360" cy="1583355"/>
           </a:xfrm>
           <a:prstGeom prst="rect">
@@ -8205,7 +8104,7 @@
       </p:pic>
       <p:sp>
         <p:nvSpPr>
-          <p:cNvPr id="4" name="灯片编号占位符 3">
+          <p:cNvPr id="5" name="灯片编号占位符 3">
             <a:extLst>
               <a:ext uri="{FF2B5EF4-FFF2-40B4-BE49-F238E27FC236}">
                 <a16:creationId xmlns:a16="http://schemas.microsoft.com/office/drawing/2014/main" id="{D5F8A530-4697-122E-23FB-8806DC45D145}"/>
@@ -8232,7 +8131,7 @@
             <a:fld id="{915DC352-AA18-B54F-943B-0795FAAB114B}" type="slidenum">
               <a:rPr lang="en-US" altLang="zh-CN" smtClean="0"/>
               <a:pPr/>
-              <a:t>1</a:t>
+              <a:t>2</a:t>
             </a:fld>
             <a:endParaRPr lang="en-US" dirty="0"/>
           </a:p>
@@ -8247,7 +8146,7 @@
 </file>
 
 <file path=ppt/slides/slide4.xml><?xml version="1.0" encoding="utf-8"?>
-<p:sld xmlns:a="http://schemas.openxmlformats.org/drawingml/2006/main" xmlns:p="http://schemas.openxmlformats.org/presentationml/2006/main" xmlns:r="http://schemas.openxmlformats.org/officeDocument/2006/relationships">
+<p:sld xmlns:a="http://schemas.openxmlformats.org/drawingml/2006/main" xmlns:r="http://schemas.openxmlformats.org/officeDocument/2006/relationships" xmlns:p="http://schemas.openxmlformats.org/presentationml/2006/main">
   <p:cSld>
     <p:spTree>
       <p:nvGrpSpPr>
@@ -8255,7 +8154,14 @@
         <p:cNvGrpSpPr/>
         <p:nvPr/>
       </p:nvGrpSpPr>
-      <p:grpSpPr/>
+      <p:grpSpPr>
+        <a:xfrm>
+          <a:off x="0" y="0"/>
+          <a:ext cx="0" cy="0"/>
+          <a:chOff x="0" y="0"/>
+          <a:chExt cx="0" cy="0"/>
+        </a:xfrm>
+      </p:grpSpPr>
       <p:sp>
         <p:nvSpPr>
           <p:cNvPr id="2" name="Title 1"/>
@@ -8294,84 +8200,62 @@
           </a:bodyPr>
           <a:lstStyle/>
           <a:p>
-            <a:pPr/>
-            <a:r>
+            <a:r>
+              <a:rPr dirty="0"/>
               <a:t>Prior work studies overthinking in chat and math settings </a:t>
             </a:r>
             <a:r>
-              <a:rPr b="0" sz="2000"/>
+              <a:rPr sz="2000" b="0" dirty="0"/>
               <a:t>[Chen et al., 2024]</a:t>
             </a:r>
           </a:p>
           <a:p>
             <a:pPr lvl="1"/>
             <a:r>
+              <a:rPr lang="en-US" dirty="0"/>
+              <a:t>They found </a:t>
+            </a:r>
+            <a:r>
+              <a:rPr dirty="0"/>
               <a:t>many reasoning tokens are spent on easy problems</a:t>
             </a:r>
           </a:p>
           <a:p>
-            <a:pPr/>
-            <a:r>
+            <a:r>
+              <a:rPr dirty="0"/>
               <a:t>We study the same cost problem in the agent setting</a:t>
             </a:r>
           </a:p>
           <a:p>
-            <a:pPr/>
-            <a:r>
+            <a:r>
+              <a:rPr dirty="0"/>
               <a:t>Key difference in the agent setting</a:t>
             </a:r>
           </a:p>
           <a:p>
             <a:pPr lvl="1"/>
             <a:r>
+              <a:rPr dirty="0"/>
               <a:t>the next tool call is </a:t>
             </a:r>
             <a:r>
-              <a:rPr b="1"/>
-              <a:t>a classification problem over a fixed tool set</a:t>
-            </a:r>
-            <a:r>
-              <a:t>, not open-ended generation</a:t>
-            </a:r>
-          </a:p>
-        </p:txBody>
-      </p:sp>
-      <p:sp>
-        <p:nvSpPr>
-          <p:cNvPr id="4" name="TextBox 3"/>
-          <p:cNvSpPr txBox="1"/>
-          <p:nvPr/>
-        </p:nvSpPr>
-        <p:spPr>
-          <a:xfrm>
-            <a:off x="429584" y="6250000"/>
-            <a:ext cx="11365562" cy="500000"/>
-          </a:xfrm>
-          <a:prstGeom prst="rect">
-            <a:avLst/>
-          </a:prstGeom>
-          <a:noFill/>
-        </p:spPr>
-        <p:txBody>
-          <a:bodyPr wrap="square">
-            <a:spAutoFit/>
-          </a:bodyPr>
-          <a:lstStyle/>
-          <a:p>
-            <a:r>
-              <a:rPr sz="1200" i="1">
+              <a:rPr b="1" dirty="0">
                 <a:solidFill>
-                  <a:srgbClr val="898781"/>
+                  <a:srgbClr val="FF0000"/>
                 </a:solidFill>
               </a:rPr>
-              <a:t>Classification has a trivial baseline: always predicting the most frequent tool. All results are compared against this majority-class baseline.</a:t>
-            </a:r>
-          </a:p>
-        </p:txBody>
-      </p:sp>
-      <p:sp>
-        <p:nvSpPr>
-          <p:cNvPr id="4" name="灯片编号占位符 3">
+              <a:t>a classification problem over a fixed tool set</a:t>
+            </a:r>
+            <a:r>
+              <a:rPr dirty="0"/>
+              <a:t>, not open-ended generation</a:t>
+            </a:r>
+          </a:p>
+        </p:txBody>
+      </p:sp>
+      <p:sp>
+        <p:nvSpPr>
+          <p:cNvPr id="5" name="灯片编号占位符 3">
             <a:extLst>
               <a:ext uri="{FF2B5EF4-FFF2-40B4-BE49-F238E27FC236}">
                 <a16:creationId xmlns:a16="http://schemas.microsoft.com/office/drawing/2014/main" id="{D5F8A530-4697-122E-23FB-8806DC45D145}"/>
@@ -8398,7 +8282,7 @@
             <a:fld id="{915DC352-AA18-B54F-943B-0795FAAB114B}" type="slidenum">
               <a:rPr lang="en-US" altLang="zh-CN" smtClean="0"/>
               <a:pPr/>
-              <a:t>1</a:t>
+              <a:t>3</a:t>
             </a:fld>
             <a:endParaRPr lang="en-US" dirty="0"/>
           </a:p>
@@ -8413,7 +8297,7 @@
 </file>
 
 <file path=ppt/slides/slide5.xml><?xml version="1.0" encoding="utf-8"?>
-<p:sld xmlns:a="http://schemas.openxmlformats.org/drawingml/2006/main" xmlns:p="http://schemas.openxmlformats.org/presentationml/2006/main" xmlns:r="http://schemas.openxmlformats.org/officeDocument/2006/relationships">
+<p:sld xmlns:a="http://schemas.openxmlformats.org/drawingml/2006/main" xmlns:r="http://schemas.openxmlformats.org/officeDocument/2006/relationships" xmlns:p="http://schemas.openxmlformats.org/presentationml/2006/main">
   <p:cSld>
     <p:spTree>
       <p:nvGrpSpPr>
@@ -8421,7 +8305,14 @@
         <p:cNvGrpSpPr/>
         <p:nvPr/>
       </p:nvGrpSpPr>
-      <p:grpSpPr/>
+      <p:grpSpPr>
+        <a:xfrm>
+          <a:off x="0" y="0"/>
+          <a:ext cx="0" cy="0"/>
+          <a:chOff x="0" y="0"/>
+          <a:chExt cx="0" cy="0"/>
+        </a:xfrm>
+      </p:grpSpPr>
       <p:sp>
         <p:nvSpPr>
           <p:cNvPr id="2" name="Title 1"/>
@@ -8460,31 +8351,33 @@
           </a:bodyPr>
           <a:lstStyle/>
           <a:p>
-            <a:pPr/>
-            <a:r>
+            <a:r>
+              <a:rPr dirty="0"/>
               <a:t>A language model can learn where to insert an API call in the middle of text, and how to use the returned result in the following text </a:t>
             </a:r>
             <a:r>
-              <a:rPr b="0" sz="2000"/>
+              <a:rPr sz="2000" b="0" dirty="0"/>
               <a:t>[Schick et al., 2023]</a:t>
             </a:r>
           </a:p>
           <a:p>
-            <a:pPr/>
-            <a:r>
+            <a:r>
+              <a:rPr dirty="0"/>
               <a:t>Our question</a:t>
             </a:r>
           </a:p>
           <a:p>
             <a:pPr lvl="1"/>
             <a:r>
+              <a:rPr dirty="0"/>
               <a:t>can a </a:t>
             </a:r>
             <a:r>
-              <a:rPr b="1"/>
+              <a:rPr b="1" dirty="0"/>
               <a:t>separate small model</a:t>
             </a:r>
             <a:r>
+              <a:rPr dirty="0"/>
               <a:t> predict the call before the agent writes it out itself?</a:t>
             </a:r>
           </a:p>
@@ -8519,7 +8412,7 @@
             <a:fld id="{915DC352-AA18-B54F-943B-0795FAAB114B}" type="slidenum">
               <a:rPr lang="en-US" altLang="zh-CN" smtClean="0"/>
               <a:pPr/>
-              <a:t>1</a:t>
+              <a:t>4</a:t>
             </a:fld>
             <a:endParaRPr lang="en-US" dirty="0"/>
           </a:p>
@@ -8534,7 +8427,7 @@
 </file>
 
 <file path=ppt/slides/slide6.xml><?xml version="1.0" encoding="utf-8"?>
-<p:sld xmlns:a="http://schemas.openxmlformats.org/drawingml/2006/main" xmlns:p="http://schemas.openxmlformats.org/presentationml/2006/main" xmlns:r="http://schemas.openxmlformats.org/officeDocument/2006/relationships">
+<p:sld xmlns:a="http://schemas.openxmlformats.org/drawingml/2006/main" xmlns:r="http://schemas.openxmlformats.org/officeDocument/2006/relationships" xmlns:p="http://schemas.openxmlformats.org/presentationml/2006/main">
   <p:cSld>
     <p:spTree>
       <p:nvGrpSpPr>
@@ -8542,7 +8435,14 @@
         <p:cNvGrpSpPr/>
         <p:nvPr/>
       </p:nvGrpSpPr>
-      <p:grpSpPr/>
+      <p:grpSpPr>
+        <a:xfrm>
+          <a:off x="0" y="0"/>
+          <a:ext cx="0" cy="0"/>
+          <a:chOff x="0" y="0"/>
+          <a:chExt cx="0" cy="0"/>
+        </a:xfrm>
+      </p:grpSpPr>
       <p:sp>
         <p:nvSpPr>
           <p:cNvPr id="2" name="Title 1"/>
@@ -8581,40 +8481,45 @@
           </a:bodyPr>
           <a:lstStyle/>
           <a:p>
-            <a:pPr/>
-            <a:r>
+            <a:r>
+              <a:rPr dirty="0"/>
               <a:t>A small probe model (</a:t>
             </a:r>
             <a:r>
-              <a:rPr b="1"/>
-              <a:t>1/20–1/34</a:t>
-            </a:r>
-            <a:r>
+              <a:rPr lang="en-US" b="1" dirty="0"/>
+              <a:t>about 1/30</a:t>
+            </a:r>
+            <a:r>
+              <a:rPr dirty="0"/>
               <a:t> of the agent model's inference cost) runs alongside the agent</a:t>
             </a:r>
           </a:p>
           <a:p>
             <a:pPr lvl="1"/>
             <a:r>
+              <a:rPr dirty="0"/>
               <a:t>At each sentence boundary, the probe reads plain text</a:t>
             </a:r>
           </a:p>
           <a:p>
             <a:pPr lvl="2"/>
             <a:r>
+              <a:rPr dirty="0"/>
               <a:t>task description + recent history + reasoning prefix</a:t>
             </a:r>
           </a:p>
           <a:p>
             <a:pPr lvl="1"/>
             <a:r>
+              <a:rPr dirty="0"/>
               <a:t>When the probe's confidence exceeds a threshold </a:t>
             </a:r>
             <a:r>
-              <a:rPr b="1"/>
+              <a:rPr b="1" dirty="0"/>
               <a:t>θ</a:t>
             </a:r>
             <a:r>
+              <a:rPr dirty="0"/>
               <a:t>, it outputs a prediction of the next tool</a:t>
             </a:r>
           </a:p>
@@ -8646,7 +8551,7 @@
       </p:pic>
       <p:sp>
         <p:nvSpPr>
-          <p:cNvPr id="4" name="灯片编号占位符 3">
+          <p:cNvPr id="5" name="灯片编号占位符 3">
             <a:extLst>
               <a:ext uri="{FF2B5EF4-FFF2-40B4-BE49-F238E27FC236}">
                 <a16:creationId xmlns:a16="http://schemas.microsoft.com/office/drawing/2014/main" id="{D5F8A530-4697-122E-23FB-8806DC45D145}"/>
@@ -8673,7 +8578,7 @@
             <a:fld id="{915DC352-AA18-B54F-943B-0795FAAB114B}" type="slidenum">
               <a:rPr lang="en-US" altLang="zh-CN" smtClean="0"/>
               <a:pPr/>
-              <a:t>1</a:t>
+              <a:t>5</a:t>
             </a:fld>
             <a:endParaRPr lang="en-US" dirty="0"/>
           </a:p>
@@ -8688,7 +8593,7 @@
 </file>
 
 <file path=ppt/slides/slide7.xml><?xml version="1.0" encoding="utf-8"?>
-<p:sld xmlns:a="http://schemas.openxmlformats.org/drawingml/2006/main" xmlns:p="http://schemas.openxmlformats.org/presentationml/2006/main" xmlns:r="http://schemas.openxmlformats.org/officeDocument/2006/relationships">
+<p:sld xmlns:a="http://schemas.openxmlformats.org/drawingml/2006/main" xmlns:r="http://schemas.openxmlformats.org/officeDocument/2006/relationships" xmlns:p="http://schemas.openxmlformats.org/presentationml/2006/main">
   <p:cSld>
     <p:spTree>
       <p:nvGrpSpPr>
@@ -8696,7 +8601,14 @@
         <p:cNvGrpSpPr/>
         <p:nvPr/>
       </p:nvGrpSpPr>
-      <p:grpSpPr/>
+      <p:grpSpPr>
+        <a:xfrm>
+          <a:off x="0" y="0"/>
+          <a:ext cx="0" cy="0"/>
+          <a:chOff x="0" y="0"/>
+          <a:chExt cx="0" cy="0"/>
+        </a:xfrm>
+      </p:grpSpPr>
       <p:sp>
         <p:nvSpPr>
           <p:cNvPr id="2" name="Title 1"/>
@@ -8713,7 +8625,7 @@
           <a:lstStyle/>
           <a:p>
             <a:r>
-              <a:t>Setup: 2 tasks × 2 agent models</a:t>
+              <a:t>The two tasks and two models</a:t>
             </a:r>
           </a:p>
         </p:txBody>
@@ -8735,55 +8647,75 @@
           </a:bodyPr>
           <a:lstStyle/>
           <a:p>
-            <a:pPr/>
-            <a:r>
-              <a:t>Official task splits</a:t>
-            </a:r>
+            <a:r>
+              <a:rPr dirty="0" err="1"/>
+              <a:t>AppWorld</a:t>
+            </a:r>
+            <a:endParaRPr dirty="0"/>
           </a:p>
           <a:p>
             <a:pPr lvl="1"/>
             <a:r>
-              <a:t>AppWorld: 90 train / 57 validation / 168 test tasks</a:t>
-            </a:r>
-          </a:p>
-          <a:p>
-            <a:pPr/>
-            <a:r>
-              <a:t>Data is split by task, so no task appears in both training and test</a:t>
-            </a:r>
-          </a:p>
-          <a:p>
-            <a:pPr/>
-            <a:r>
-              <a:t>All models are run with vLLM; one probe is trained per task × model pair</a:t>
-            </a:r>
-          </a:p>
-        </p:txBody>
-      </p:sp>
-      <p:pic>
-        <p:nvPicPr>
-          <p:cNvPr id="4" name="Picture 3" descr="fig07_setting.png"/>
-          <p:cNvPicPr>
-            <a:picLocks noChangeAspect="1"/>
-          </p:cNvPicPr>
-          <p:nvPr/>
-        </p:nvPicPr>
-        <p:blipFill>
-          <a:blip r:embed="rId2"/>
-          <a:stretch>
-            <a:fillRect/>
-          </a:stretch>
-        </p:blipFill>
-        <p:spPr>
-          <a:xfrm>
-            <a:off x="1798320" y="3794760"/>
-            <a:ext cx="8595360" cy="2510749"/>
-          </a:xfrm>
-          <a:prstGeom prst="rect">
-            <a:avLst/>
-          </a:prstGeom>
-        </p:spPr>
-      </p:pic>
+              <a:rPr dirty="0"/>
+              <a:t>the agent operates phone apps (email, shopping, music, …) through API calls to finish everyday tasks</a:t>
+            </a:r>
+          </a:p>
+          <a:p>
+            <a:pPr lvl="1"/>
+            <a:r>
+              <a:rPr dirty="0"/>
+              <a:t>many distinct tools, each with its own arguments</a:t>
+            </a:r>
+          </a:p>
+          <a:p>
+            <a:r>
+              <a:rPr dirty="0" err="1"/>
+              <a:t>ALFWorld</a:t>
+            </a:r>
+            <a:endParaRPr dirty="0"/>
+          </a:p>
+          <a:p>
+            <a:pPr lvl="1"/>
+            <a:r>
+              <a:rPr dirty="0"/>
+              <a:t>the agent acts in a text-described household (go somewhere, pick something up, put it down, …) to complete </a:t>
+            </a:r>
+            <a:r>
+              <a:rPr lang="en-US" dirty="0" err="1"/>
+              <a:t>houseworks</a:t>
+            </a:r>
+            <a:endParaRPr dirty="0"/>
+          </a:p>
+          <a:p>
+            <a:pPr lvl="1"/>
+            <a:r>
+              <a:rPr dirty="0"/>
+              <a:t>few action types, repeated often</a:t>
+            </a:r>
+          </a:p>
+          <a:p>
+            <a:r>
+              <a:rPr dirty="0"/>
+              <a:t>Models</a:t>
+            </a:r>
+          </a:p>
+          <a:p>
+            <a:pPr lvl="1"/>
+            <a:r>
+              <a:rPr b="1" dirty="0"/>
+              <a:t>gpt-oss-120b</a:t>
+            </a:r>
+            <a:r>
+              <a:rPr dirty="0"/>
+              <a:t> and </a:t>
+            </a:r>
+            <a:r>
+              <a:rPr b="1" dirty="0"/>
+              <a:t>qwen3.6-27b</a:t>
+            </a:r>
+          </a:p>
+        </p:txBody>
+      </p:sp>
       <p:sp>
         <p:nvSpPr>
           <p:cNvPr id="4" name="灯片编号占位符 3">
@@ -8813,7 +8745,7 @@
             <a:fld id="{915DC352-AA18-B54F-943B-0795FAAB114B}" type="slidenum">
               <a:rPr lang="en-US" altLang="zh-CN" smtClean="0"/>
               <a:pPr/>
-              <a:t>1</a:t>
+              <a:t>6</a:t>
             </a:fld>
             <a:endParaRPr lang="en-US" dirty="0"/>
           </a:p>
@@ -8828,7 +8760,7 @@
 </file>
 
 <file path=ppt/slides/slide8.xml><?xml version="1.0" encoding="utf-8"?>
-<p:sld xmlns:a="http://schemas.openxmlformats.org/drawingml/2006/main" xmlns:p="http://schemas.openxmlformats.org/presentationml/2006/main" xmlns:r="http://schemas.openxmlformats.org/officeDocument/2006/relationships">
+<p:sld xmlns:a="http://schemas.openxmlformats.org/drawingml/2006/main" xmlns:r="http://schemas.openxmlformats.org/officeDocument/2006/relationships" xmlns:p="http://schemas.openxmlformats.org/presentationml/2006/main">
   <p:cSld>
     <p:spTree>
       <p:nvGrpSpPr>
@@ -8836,155 +8768,14 @@
         <p:cNvGrpSpPr/>
         <p:nvPr/>
       </p:nvGrpSpPr>
-      <p:grpSpPr/>
-      <p:sp>
-        <p:nvSpPr>
-          <p:cNvPr id="2" name="Title 1"/>
-          <p:cNvSpPr>
-            <a:spLocks noGrp="1"/>
-          </p:cNvSpPr>
-          <p:nvPr>
-            <p:ph type="title"/>
-          </p:nvPr>
-        </p:nvSpPr>
-        <p:spPr/>
-        <p:txBody>
-          <a:bodyPr/>
-          <a:lstStyle/>
-          <a:p>
-            <a:r>
-              <a:t>The two tasks and two models</a:t>
-            </a:r>
-          </a:p>
-        </p:txBody>
-      </p:sp>
-      <p:sp>
-        <p:nvSpPr>
-          <p:cNvPr id="3" name="Content Placeholder 2"/>
-          <p:cNvSpPr>
-            <a:spLocks noGrp="1"/>
-          </p:cNvSpPr>
-          <p:nvPr>
-            <p:ph idx="1"/>
-          </p:nvPr>
-        </p:nvSpPr>
-        <p:spPr/>
-        <p:txBody>
-          <a:bodyPr>
-            <a:normAutofit/>
-          </a:bodyPr>
-          <a:lstStyle/>
-          <a:p>
-            <a:pPr/>
-            <a:r>
-              <a:t>AppWorld</a:t>
-            </a:r>
-          </a:p>
-          <a:p>
-            <a:pPr lvl="1"/>
-            <a:r>
-              <a:t>the agent operates phone apps (email, shopping, music, …) through API calls to finish everyday tasks</a:t>
-            </a:r>
-          </a:p>
-          <a:p>
-            <a:pPr lvl="1"/>
-            <a:r>
-              <a:t>many distinct tools, each with its own arguments</a:t>
-            </a:r>
-          </a:p>
-          <a:p>
-            <a:pPr/>
-            <a:r>
-              <a:t>ALFWorld</a:t>
-            </a:r>
-          </a:p>
-          <a:p>
-            <a:pPr lvl="1"/>
-            <a:r>
-              <a:t>the agent acts in a text-described household (go somewhere, pick something up, put it down, …) to complete chores</a:t>
-            </a:r>
-          </a:p>
-          <a:p>
-            <a:pPr lvl="1"/>
-            <a:r>
-              <a:t>few action types, repeated often</a:t>
-            </a:r>
-          </a:p>
-          <a:p>
-            <a:pPr/>
-            <a:r>
-              <a:t>Models</a:t>
-            </a:r>
-          </a:p>
-          <a:p>
-            <a:pPr lvl="1"/>
-            <a:r>
-              <a:rPr b="1"/>
-              <a:t>gpt-oss-120b</a:t>
-            </a:r>
-            <a:r>
-              <a:t> and </a:t>
-            </a:r>
-            <a:r>
-              <a:rPr b="1"/>
-              <a:t>qwen3.6-27b</a:t>
-            </a:r>
-          </a:p>
-        </p:txBody>
-      </p:sp>
-      <p:sp>
-        <p:nvSpPr>
-          <p:cNvPr id="4" name="灯片编号占位符 3">
-            <a:extLst>
-              <a:ext uri="{FF2B5EF4-FFF2-40B4-BE49-F238E27FC236}">
-                <a16:creationId xmlns:a16="http://schemas.microsoft.com/office/drawing/2014/main" id="{D5F8A530-4697-122E-23FB-8806DC45D145}"/>
-              </a:ext>
-            </a:extLst>
-          </p:cNvPr>
-          <p:cNvSpPr>
-            <a:spLocks noGrp="1"/>
-          </p:cNvSpPr>
-          <p:nvPr>
-            <p:ph type="sldNum" sz="quarter" idx="12"/>
-          </p:nvPr>
-        </p:nvSpPr>
-        <p:spPr>
-          <a:xfrm>
-            <a:off x="9389988" y="6417719"/>
-            <a:ext cx="2743200" cy="365125"/>
-          </a:xfrm>
-        </p:spPr>
-        <p:txBody>
-          <a:bodyPr/>
-          <a:lstStyle/>
-          <a:p>
-            <a:fld id="{915DC352-AA18-B54F-943B-0795FAAB114B}" type="slidenum">
-              <a:rPr lang="en-US" altLang="zh-CN" smtClean="0"/>
-              <a:pPr/>
-              <a:t>1</a:t>
-            </a:fld>
-            <a:endParaRPr lang="en-US" dirty="0"/>
-          </a:p>
-        </p:txBody>
-      </p:sp>
-    </p:spTree>
-  </p:cSld>
-  <p:clrMapOvr>
-    <a:masterClrMapping/>
-  </p:clrMapOvr>
-</p:sld>
-</file>
-
-<file path=ppt/slides/slide9.xml><?xml version="1.0" encoding="utf-8"?>
-<p:sld xmlns:a="http://schemas.openxmlformats.org/drawingml/2006/main" xmlns:p="http://schemas.openxmlformats.org/presentationml/2006/main" xmlns:r="http://schemas.openxmlformats.org/officeDocument/2006/relationships">
-  <p:cSld>
-    <p:spTree>
-      <p:nvGrpSpPr>
-        <p:cNvPr id="1" name=""/>
-        <p:cNvGrpSpPr/>
-        <p:nvPr/>
-      </p:nvGrpSpPr>
-      <p:grpSpPr/>
+      <p:grpSpPr>
+        <a:xfrm>
+          <a:off x="0" y="0"/>
+          <a:ext cx="0" cy="0"/>
+          <a:chOff x="0" y="0"/>
+          <a:chExt cx="0" cy="0"/>
+        </a:xfrm>
+      </p:grpSpPr>
       <p:sp>
         <p:nvSpPr>
           <p:cNvPr id="2" name="Title 1"/>
@@ -9072,8 +8863,8 @@
         </p:blipFill>
         <p:spPr>
           <a:xfrm>
-            <a:off x="2621280" y="3931920"/>
-            <a:ext cx="6949440" cy="2273046"/>
+            <a:off x="1703560" y="3196104"/>
+            <a:ext cx="9113454" cy="2980859"/>
           </a:xfrm>
           <a:prstGeom prst="rect">
             <a:avLst/>
@@ -9082,34 +8873,182 @@
       </p:pic>
       <p:sp>
         <p:nvSpPr>
-          <p:cNvPr id="5" name="TextBox 4"/>
-          <p:cNvSpPr txBox="1"/>
-          <p:nvPr/>
+          <p:cNvPr id="6" name="灯片编号占位符 3">
+            <a:extLst>
+              <a:ext uri="{FF2B5EF4-FFF2-40B4-BE49-F238E27FC236}">
+                <a16:creationId xmlns:a16="http://schemas.microsoft.com/office/drawing/2014/main" id="{D5F8A530-4697-122E-23FB-8806DC45D145}"/>
+              </a:ext>
+            </a:extLst>
+          </p:cNvPr>
+          <p:cNvSpPr>
+            <a:spLocks noGrp="1"/>
+          </p:cNvSpPr>
+          <p:nvPr>
+            <p:ph type="sldNum" sz="quarter" idx="12"/>
+          </p:nvPr>
         </p:nvSpPr>
         <p:spPr>
           <a:xfrm>
-            <a:off x="429584" y="6250000"/>
-            <a:ext cx="11365562" cy="500000"/>
+            <a:off x="9389988" y="6417719"/>
+            <a:ext cx="2743200" cy="365125"/>
           </a:xfrm>
-          <a:prstGeom prst="rect">
-            <a:avLst/>
-          </a:prstGeom>
-          <a:noFill/>
         </p:spPr>
         <p:txBody>
-          <a:bodyPr wrap="square">
-            <a:spAutoFit/>
+          <a:bodyPr/>
+          <a:lstStyle/>
+          <a:p>
+            <a:fld id="{915DC352-AA18-B54F-943B-0795FAAB114B}" type="slidenum">
+              <a:rPr lang="en-US" altLang="zh-CN" smtClean="0"/>
+              <a:pPr/>
+              <a:t>7</a:t>
+            </a:fld>
+            <a:endParaRPr lang="en-US" dirty="0"/>
+          </a:p>
+        </p:txBody>
+      </p:sp>
+    </p:spTree>
+  </p:cSld>
+  <p:clrMapOvr>
+    <a:masterClrMapping/>
+  </p:clrMapOvr>
+</p:sld>
+</file>
+
+<file path=ppt/slides/slide9.xml><?xml version="1.0" encoding="utf-8"?>
+<p:sld xmlns:a="http://schemas.openxmlformats.org/drawingml/2006/main" xmlns:r="http://schemas.openxmlformats.org/officeDocument/2006/relationships" xmlns:p="http://schemas.openxmlformats.org/presentationml/2006/main">
+  <p:cSld>
+    <p:spTree>
+      <p:nvGrpSpPr>
+        <p:cNvPr id="1" name=""/>
+        <p:cNvGrpSpPr/>
+        <p:nvPr/>
+      </p:nvGrpSpPr>
+      <p:grpSpPr>
+        <a:xfrm>
+          <a:off x="0" y="0"/>
+          <a:ext cx="0" cy="0"/>
+          <a:chOff x="0" y="0"/>
+          <a:chExt cx="0" cy="0"/>
+        </a:xfrm>
+      </p:grpSpPr>
+      <p:sp>
+        <p:nvSpPr>
+          <p:cNvPr id="2" name="Title 1"/>
+          <p:cNvSpPr>
+            <a:spLocks noGrp="1"/>
+          </p:cNvSpPr>
+          <p:nvPr>
+            <p:ph type="title"/>
+          </p:nvPr>
+        </p:nvSpPr>
+        <p:spPr/>
+        <p:txBody>
+          <a:bodyPr/>
+          <a:lstStyle/>
+          <a:p>
+            <a:r>
+              <a:t>Probe training</a:t>
+            </a:r>
+          </a:p>
+        </p:txBody>
+      </p:sp>
+      <p:sp>
+        <p:nvSpPr>
+          <p:cNvPr id="3" name="Content Placeholder 2"/>
+          <p:cNvSpPr>
+            <a:spLocks noGrp="1"/>
+          </p:cNvSpPr>
+          <p:nvPr>
+            <p:ph idx="1"/>
+          </p:nvPr>
+        </p:nvSpPr>
+        <p:spPr/>
+        <p:txBody>
+          <a:bodyPr>
+            <a:normAutofit/>
           </a:bodyPr>
           <a:lstStyle/>
           <a:p>
             <a:r>
-              <a:rPr sz="1200" i="1">
-                <a:solidFill>
-                  <a:srgbClr val="898781"/>
-                </a:solidFill>
-              </a:rPr>
-              <a:t>Sample text = task description + last 3 turns of history + reasoning prefix.</a:t>
-            </a:r>
+              <a:rPr dirty="0"/>
+              <a:t>Qwen3-0.6B-Base, full fine-tuning, with a linear classification head over tool names</a:t>
+            </a:r>
+          </a:p>
+          <a:p>
+            <a:pPr lvl="1"/>
+            <a:r>
+              <a:rPr dirty="0"/>
+              <a:t>One forward pass per event, with supervision at every sentence-boundary position</a:t>
+            </a:r>
+          </a:p>
+          <a:p>
+            <a:pPr lvl="1"/>
+            <a:r>
+              <a:rPr dirty="0"/>
+              <a:t>Each position is weighted 1/</a:t>
+            </a:r>
+            <a:r>
+              <a:rPr lang="en-US" dirty="0"/>
+              <a:t>w</a:t>
+            </a:r>
+            <a:r>
+              <a:rPr dirty="0"/>
+              <a:t>, </a:t>
+            </a:r>
+            <a:r>
+              <a:rPr lang="en-US" dirty="0"/>
+              <a:t>w is the number of steps in a single trajectory</a:t>
+            </a:r>
+          </a:p>
+          <a:p>
+            <a:r>
+              <a:rPr dirty="0" err="1"/>
+              <a:t>ModernBERT</a:t>
+            </a:r>
+            <a:r>
+              <a:rPr dirty="0"/>
+              <a:t>-base (150M), same procedure</a:t>
+            </a:r>
+            <a:endParaRPr lang="en-US" dirty="0"/>
+          </a:p>
+          <a:p>
+            <a:endParaRPr lang="en-US" dirty="0"/>
+          </a:p>
+          <a:p>
+            <a:r>
+              <a:rPr lang="en-US" dirty="0"/>
+              <a:t>Why we chose these two kinds of models: </a:t>
+            </a:r>
+          </a:p>
+          <a:p>
+            <a:pPr lvl="1"/>
+            <a:r>
+              <a:rPr lang="en-US" dirty="0"/>
+              <a:t>Qwen3 is causal, so it is cheaper since we only need to add additional tokens when following the agent</a:t>
+            </a:r>
+          </a:p>
+          <a:p>
+            <a:pPr lvl="1"/>
+            <a:r>
+              <a:rPr lang="en-US" dirty="0"/>
+              <a:t>We need to send all tokens to BERT for each sentence</a:t>
+            </a:r>
+          </a:p>
+          <a:p>
+            <a:pPr lvl="1"/>
+            <a:r>
+              <a:rPr lang="en-US" dirty="0"/>
+              <a:t>Although Qwen3 is 600M, it is still </a:t>
+            </a:r>
+            <a:r>
+              <a:rPr lang="en-US" altLang="zh-CN" dirty="0"/>
+              <a:t>overall </a:t>
+            </a:r>
+            <a:r>
+              <a:rPr lang="en-US" dirty="0"/>
+              <a:t>faster compared to an 150M BERT</a:t>
+            </a:r>
+            <a:endParaRPr dirty="0"/>
           </a:p>
         </p:txBody>
       </p:sp>
@@ -9142,12 +9081,36 @@
             <a:fld id="{915DC352-AA18-B54F-943B-0795FAAB114B}" type="slidenum">
               <a:rPr lang="en-US" altLang="zh-CN" smtClean="0"/>
               <a:pPr/>
-              <a:t>1</a:t>
+              <a:t>8</a:t>
             </a:fld>
             <a:endParaRPr lang="en-US" dirty="0"/>
           </a:p>
         </p:txBody>
       </p:sp>
+      <p:pic>
+        <p:nvPicPr>
+          <p:cNvPr id="5" name="Picture 4" descr="fig10_training.png"/>
+          <p:cNvPicPr>
+            <a:picLocks noChangeAspect="1"/>
+          </p:cNvPicPr>
+          <p:nvPr/>
+        </p:nvPicPr>
+        <p:blipFill>
+          <a:blip r:embed="rId2"/>
+          <a:stretch>
+            <a:fillRect/>
+          </a:stretch>
+        </p:blipFill>
+        <p:spPr>
+          <a:xfrm>
+            <a:off x="3992880" y="5925312"/>
+            <a:ext cx="4206240" cy="858774"/>
+          </a:xfrm>
+          <a:prstGeom prst="rect">
+            <a:avLst/>
+          </a:prstGeom>
+        </p:spPr>
+      </p:pic>
     </p:spTree>
   </p:cSld>
   <p:clrMapOvr>
